--- a/TTL/OR GATE/OR TTL.pptx
+++ b/TTL/OR GATE/OR TTL.pptx
@@ -5,7 +5,7 @@
     <p:sldMasterId id="2147483648" r:id="rId1"/>
   </p:sldMasterIdLst>
   <p:notesMasterIdLst>
-    <p:notesMasterId r:id="rId12"/>
+    <p:notesMasterId r:id="rId13"/>
   </p:notesMasterIdLst>
   <p:sldIdLst>
     <p:sldId id="270" r:id="rId2"/>
@@ -18,6 +18,7 @@
     <p:sldId id="277" r:id="rId9"/>
     <p:sldId id="272" r:id="rId10"/>
     <p:sldId id="278" r:id="rId11"/>
+    <p:sldId id="279" r:id="rId12"/>
   </p:sldIdLst>
   <p:sldSz cx="12192000" cy="6858000"/>
   <p:notesSz cx="6858000" cy="9144000"/>
@@ -217,7 +218,7 @@
           <a:p>
             <a:fld id="{9DD190B2-7A9C-4DAC-A02D-C9262B89C753}" type="datetimeFigureOut">
               <a:rPr lang="en-US" smtClean="0"/>
-              <a:t>3/17/2025</a:t>
+              <a:t>5/26/2025</a:t>
             </a:fld>
             <a:endParaRPr lang="en-US"/>
           </a:p>
@@ -823,7 +824,7 @@
           <a:p>
             <a:fld id="{B812FF79-FF33-48C1-9348-0D4F15BD4EB9}" type="datetimeFigureOut">
               <a:rPr lang="en-US" smtClean="0"/>
-              <a:t>3/17/2025</a:t>
+              <a:t>5/26/2025</a:t>
             </a:fld>
             <a:endParaRPr lang="en-US"/>
           </a:p>
@@ -1021,7 +1022,7 @@
           <a:p>
             <a:fld id="{B812FF79-FF33-48C1-9348-0D4F15BD4EB9}" type="datetimeFigureOut">
               <a:rPr lang="en-US" smtClean="0"/>
-              <a:t>3/17/2025</a:t>
+              <a:t>5/26/2025</a:t>
             </a:fld>
             <a:endParaRPr lang="en-US"/>
           </a:p>
@@ -1229,7 +1230,7 @@
           <a:p>
             <a:fld id="{B812FF79-FF33-48C1-9348-0D4F15BD4EB9}" type="datetimeFigureOut">
               <a:rPr lang="en-US" smtClean="0"/>
-              <a:t>3/17/2025</a:t>
+              <a:t>5/26/2025</a:t>
             </a:fld>
             <a:endParaRPr lang="en-US"/>
           </a:p>
@@ -1427,7 +1428,7 @@
           <a:p>
             <a:fld id="{B812FF79-FF33-48C1-9348-0D4F15BD4EB9}" type="datetimeFigureOut">
               <a:rPr lang="en-US" smtClean="0"/>
-              <a:t>3/17/2025</a:t>
+              <a:t>5/26/2025</a:t>
             </a:fld>
             <a:endParaRPr lang="en-US"/>
           </a:p>
@@ -1702,7 +1703,7 @@
           <a:p>
             <a:fld id="{B812FF79-FF33-48C1-9348-0D4F15BD4EB9}" type="datetimeFigureOut">
               <a:rPr lang="en-US" smtClean="0"/>
-              <a:t>3/17/2025</a:t>
+              <a:t>5/26/2025</a:t>
             </a:fld>
             <a:endParaRPr lang="en-US"/>
           </a:p>
@@ -1967,7 +1968,7 @@
           <a:p>
             <a:fld id="{B812FF79-FF33-48C1-9348-0D4F15BD4EB9}" type="datetimeFigureOut">
               <a:rPr lang="en-US" smtClean="0"/>
-              <a:t>3/17/2025</a:t>
+              <a:t>5/26/2025</a:t>
             </a:fld>
             <a:endParaRPr lang="en-US"/>
           </a:p>
@@ -2379,7 +2380,7 @@
           <a:p>
             <a:fld id="{B812FF79-FF33-48C1-9348-0D4F15BD4EB9}" type="datetimeFigureOut">
               <a:rPr lang="en-US" smtClean="0"/>
-              <a:t>3/17/2025</a:t>
+              <a:t>5/26/2025</a:t>
             </a:fld>
             <a:endParaRPr lang="en-US"/>
           </a:p>
@@ -2520,7 +2521,7 @@
           <a:p>
             <a:fld id="{B812FF79-FF33-48C1-9348-0D4F15BD4EB9}" type="datetimeFigureOut">
               <a:rPr lang="en-US" smtClean="0"/>
-              <a:t>3/17/2025</a:t>
+              <a:t>5/26/2025</a:t>
             </a:fld>
             <a:endParaRPr lang="en-US"/>
           </a:p>
@@ -2633,7 +2634,7 @@
           <a:p>
             <a:fld id="{B812FF79-FF33-48C1-9348-0D4F15BD4EB9}" type="datetimeFigureOut">
               <a:rPr lang="en-US" smtClean="0"/>
-              <a:t>3/17/2025</a:t>
+              <a:t>5/26/2025</a:t>
             </a:fld>
             <a:endParaRPr lang="en-US"/>
           </a:p>
@@ -2944,7 +2945,7 @@
           <a:p>
             <a:fld id="{B812FF79-FF33-48C1-9348-0D4F15BD4EB9}" type="datetimeFigureOut">
               <a:rPr lang="en-US" smtClean="0"/>
-              <a:t>3/17/2025</a:t>
+              <a:t>5/26/2025</a:t>
             </a:fld>
             <a:endParaRPr lang="en-US"/>
           </a:p>
@@ -3232,7 +3233,7 @@
           <a:p>
             <a:fld id="{B812FF79-FF33-48C1-9348-0D4F15BD4EB9}" type="datetimeFigureOut">
               <a:rPr lang="en-US" smtClean="0"/>
-              <a:t>3/17/2025</a:t>
+              <a:t>5/26/2025</a:t>
             </a:fld>
             <a:endParaRPr lang="en-US"/>
           </a:p>
@@ -3473,7 +3474,7 @@
           <a:p>
             <a:fld id="{B812FF79-FF33-48C1-9348-0D4F15BD4EB9}" type="datetimeFigureOut">
               <a:rPr lang="en-US" smtClean="0"/>
-              <a:t>3/17/2025</a:t>
+              <a:t>5/26/2025</a:t>
             </a:fld>
             <a:endParaRPr lang="en-US"/>
           </a:p>
@@ -7868,6 +7869,3054 @@
 </p:sld>
 </file>
 
+<file path=ppt/slides/slide11.xml><?xml version="1.0" encoding="utf-8"?>
+<p:sld xmlns:a="http://schemas.openxmlformats.org/drawingml/2006/main" xmlns:r="http://schemas.openxmlformats.org/officeDocument/2006/relationships" xmlns:p="http://schemas.openxmlformats.org/presentationml/2006/main">
+  <p:cSld>
+    <p:spTree>
+      <p:nvGrpSpPr>
+        <p:cNvPr id="1" name="">
+          <a:extLst>
+            <a:ext uri="{FF2B5EF4-FFF2-40B4-BE49-F238E27FC236}">
+              <a16:creationId xmlns:a16="http://schemas.microsoft.com/office/drawing/2014/main" id="{46F0C074-495A-9418-B5F1-8F8AD1170A96}"/>
+            </a:ext>
+          </a:extLst>
+        </p:cNvPr>
+        <p:cNvGrpSpPr/>
+        <p:nvPr/>
+      </p:nvGrpSpPr>
+      <p:grpSpPr>
+        <a:xfrm>
+          <a:off x="0" y="0"/>
+          <a:ext cx="0" cy="0"/>
+          <a:chOff x="0" y="0"/>
+          <a:chExt cx="0" cy="0"/>
+        </a:xfrm>
+      </p:grpSpPr>
+      <p:grpSp>
+        <p:nvGrpSpPr>
+          <p:cNvPr id="108" name="Group 107">
+            <a:extLst>
+              <a:ext uri="{FF2B5EF4-FFF2-40B4-BE49-F238E27FC236}">
+                <a16:creationId xmlns:a16="http://schemas.microsoft.com/office/drawing/2014/main" id="{8DA359ED-6F9F-F073-A751-3CA5AAA0AF96}"/>
+              </a:ext>
+            </a:extLst>
+          </p:cNvPr>
+          <p:cNvGrpSpPr/>
+          <p:nvPr/>
+        </p:nvGrpSpPr>
+        <p:grpSpPr>
+          <a:xfrm>
+            <a:off x="1105992" y="-133915"/>
+            <a:ext cx="10466287" cy="6022744"/>
+            <a:chOff x="1232452" y="854766"/>
+            <a:chExt cx="10466287" cy="6022744"/>
+          </a:xfrm>
+        </p:grpSpPr>
+        <p:pic>
+          <p:nvPicPr>
+            <p:cNvPr id="91" name="Picture 90">
+              <a:extLst>
+                <a:ext uri="{FF2B5EF4-FFF2-40B4-BE49-F238E27FC236}">
+                  <a16:creationId xmlns:a16="http://schemas.microsoft.com/office/drawing/2014/main" id="{739859A9-CB3B-D46E-CFFF-27B14E205A59}"/>
+                </a:ext>
+              </a:extLst>
+            </p:cNvPr>
+            <p:cNvPicPr>
+              <a:picLocks noChangeAspect="1"/>
+            </p:cNvPicPr>
+            <p:nvPr/>
+          </p:nvPicPr>
+          <p:blipFill>
+            <a:blip r:embed="rId2">
+              <a:extLst>
+                <a:ext uri="{28A0092B-C50C-407E-A947-70E740481C1C}">
+                  <a14:useLocalDpi xmlns:a14="http://schemas.microsoft.com/office/drawing/2010/main" val="0"/>
+                </a:ext>
+              </a:extLst>
+            </a:blip>
+            <a:srcRect t="36811" b="36590"/>
+            <a:stretch/>
+          </p:blipFill>
+          <p:spPr>
+            <a:xfrm rot="10800000" flipV="1">
+              <a:off x="9149729" y="5566361"/>
+              <a:ext cx="842909" cy="100031"/>
+            </a:xfrm>
+            <a:prstGeom prst="rect">
+              <a:avLst/>
+            </a:prstGeom>
+          </p:spPr>
+        </p:pic>
+        <p:pic>
+          <p:nvPicPr>
+            <p:cNvPr id="3" name="Picture 2">
+              <a:extLst>
+                <a:ext uri="{FF2B5EF4-FFF2-40B4-BE49-F238E27FC236}">
+                  <a16:creationId xmlns:a16="http://schemas.microsoft.com/office/drawing/2014/main" id="{B1336FBB-BC9B-AFFC-0695-1CCC6C988D58}"/>
+                </a:ext>
+              </a:extLst>
+            </p:cNvPr>
+            <p:cNvPicPr>
+              <a:picLocks noChangeAspect="1"/>
+            </p:cNvPicPr>
+            <p:nvPr/>
+          </p:nvPicPr>
+          <p:blipFill>
+            <a:blip r:embed="rId3">
+              <a:extLst>
+                <a:ext uri="{28A0092B-C50C-407E-A947-70E740481C1C}">
+                  <a14:useLocalDpi xmlns:a14="http://schemas.microsoft.com/office/drawing/2010/main" val="0"/>
+                </a:ext>
+              </a:extLst>
+            </a:blip>
+            <a:srcRect l="16702" r="17632"/>
+            <a:stretch/>
+          </p:blipFill>
+          <p:spPr>
+            <a:xfrm>
+              <a:off x="7096891" y="3533926"/>
+              <a:ext cx="1217060" cy="2226023"/>
+            </a:xfrm>
+            <a:prstGeom prst="rect">
+              <a:avLst/>
+            </a:prstGeom>
+          </p:spPr>
+        </p:pic>
+        <p:pic>
+          <p:nvPicPr>
+            <p:cNvPr id="8" name="Picture 7">
+              <a:extLst>
+                <a:ext uri="{FF2B5EF4-FFF2-40B4-BE49-F238E27FC236}">
+                  <a16:creationId xmlns:a16="http://schemas.microsoft.com/office/drawing/2014/main" id="{CF24F0A1-D7E2-D12D-351A-3955F5A24F6B}"/>
+                </a:ext>
+              </a:extLst>
+            </p:cNvPr>
+            <p:cNvPicPr>
+              <a:picLocks noChangeAspect="1"/>
+            </p:cNvPicPr>
+            <p:nvPr/>
+          </p:nvPicPr>
+          <p:blipFill>
+            <a:blip r:embed="rId4">
+              <a:extLst>
+                <a:ext uri="{28A0092B-C50C-407E-A947-70E740481C1C}">
+                  <a14:useLocalDpi xmlns:a14="http://schemas.microsoft.com/office/drawing/2010/main" val="0"/>
+                </a:ext>
+              </a:extLst>
+            </a:blip>
+            <a:stretch>
+              <a:fillRect/>
+            </a:stretch>
+          </p:blipFill>
+          <p:spPr>
+            <a:xfrm rot="5400000">
+              <a:off x="1069170" y="1018048"/>
+              <a:ext cx="1950794" cy="1624229"/>
+            </a:xfrm>
+            <a:prstGeom prst="rect">
+              <a:avLst/>
+            </a:prstGeom>
+          </p:spPr>
+        </p:pic>
+        <p:pic>
+          <p:nvPicPr>
+            <p:cNvPr id="10" name="Picture 9">
+              <a:extLst>
+                <a:ext uri="{FF2B5EF4-FFF2-40B4-BE49-F238E27FC236}">
+                  <a16:creationId xmlns:a16="http://schemas.microsoft.com/office/drawing/2014/main" id="{786614FA-CD8A-828F-A4DE-8B79AD0FF17F}"/>
+                </a:ext>
+              </a:extLst>
+            </p:cNvPr>
+            <p:cNvPicPr>
+              <a:picLocks noChangeAspect="1"/>
+            </p:cNvPicPr>
+            <p:nvPr/>
+          </p:nvPicPr>
+          <p:blipFill>
+            <a:blip r:embed="rId5">
+              <a:extLst>
+                <a:ext uri="{28A0092B-C50C-407E-A947-70E740481C1C}">
+                  <a14:useLocalDpi xmlns:a14="http://schemas.microsoft.com/office/drawing/2010/main" val="0"/>
+                </a:ext>
+              </a:extLst>
+            </a:blip>
+            <a:srcRect l="28724" t="21357" r="22826" b="29462"/>
+            <a:stretch/>
+          </p:blipFill>
+          <p:spPr>
+            <a:xfrm>
+              <a:off x="9845354" y="3578952"/>
+              <a:ext cx="1853385" cy="2259616"/>
+            </a:xfrm>
+            <a:prstGeom prst="rect">
+              <a:avLst/>
+            </a:prstGeom>
+          </p:spPr>
+        </p:pic>
+        <p:pic>
+          <p:nvPicPr>
+            <p:cNvPr id="14" name="Picture 13">
+              <a:extLst>
+                <a:ext uri="{FF2B5EF4-FFF2-40B4-BE49-F238E27FC236}">
+                  <a16:creationId xmlns:a16="http://schemas.microsoft.com/office/drawing/2014/main" id="{66C7F793-CB80-5937-9234-03B2BD14ECC2}"/>
+                </a:ext>
+              </a:extLst>
+            </p:cNvPr>
+            <p:cNvPicPr>
+              <a:picLocks noChangeAspect="1"/>
+            </p:cNvPicPr>
+            <p:nvPr/>
+          </p:nvPicPr>
+          <p:blipFill>
+            <a:blip r:embed="rId2">
+              <a:extLst>
+                <a:ext uri="{28A0092B-C50C-407E-A947-70E740481C1C}">
+                  <a14:useLocalDpi xmlns:a14="http://schemas.microsoft.com/office/drawing/2010/main" val="0"/>
+                </a:ext>
+              </a:extLst>
+            </a:blip>
+            <a:srcRect t="36811" b="36590"/>
+            <a:stretch/>
+          </p:blipFill>
+          <p:spPr>
+            <a:xfrm rot="5400000" flipV="1">
+              <a:off x="4201832" y="3948403"/>
+              <a:ext cx="1075964" cy="127689"/>
+            </a:xfrm>
+            <a:prstGeom prst="rect">
+              <a:avLst/>
+            </a:prstGeom>
+          </p:spPr>
+        </p:pic>
+        <p:cxnSp>
+          <p:nvCxnSpPr>
+            <p:cNvPr id="18" name="Straight Connector 17">
+              <a:extLst>
+                <a:ext uri="{FF2B5EF4-FFF2-40B4-BE49-F238E27FC236}">
+                  <a16:creationId xmlns:a16="http://schemas.microsoft.com/office/drawing/2014/main" id="{EAE0D8FA-AB22-D272-CC01-87882C975EE5}"/>
+                </a:ext>
+              </a:extLst>
+            </p:cNvPr>
+            <p:cNvCxnSpPr>
+              <a:cxnSpLocks/>
+            </p:cNvCxnSpPr>
+            <p:nvPr/>
+          </p:nvCxnSpPr>
+          <p:spPr>
+            <a:xfrm rot="5400000">
+              <a:off x="6462425" y="3012409"/>
+              <a:ext cx="3017861" cy="207071"/>
+            </a:xfrm>
+            <a:prstGeom prst="bentConnector3">
+              <a:avLst>
+                <a:gd name="adj1" fmla="val 99885"/>
+              </a:avLst>
+            </a:prstGeom>
+            <a:ln w="38100">
+              <a:solidFill>
+                <a:schemeClr val="tx1"/>
+              </a:solidFill>
+            </a:ln>
+          </p:spPr>
+          <p:style>
+            <a:lnRef idx="1">
+              <a:schemeClr val="dk1"/>
+            </a:lnRef>
+            <a:fillRef idx="0">
+              <a:schemeClr val="dk1"/>
+            </a:fillRef>
+            <a:effectRef idx="0">
+              <a:schemeClr val="dk1"/>
+            </a:effectRef>
+            <a:fontRef idx="minor">
+              <a:schemeClr val="tx1"/>
+            </a:fontRef>
+          </p:style>
+        </p:cxnSp>
+        <p:cxnSp>
+          <p:nvCxnSpPr>
+            <p:cNvPr id="22" name="Straight Connector 21">
+              <a:extLst>
+                <a:ext uri="{FF2B5EF4-FFF2-40B4-BE49-F238E27FC236}">
+                  <a16:creationId xmlns:a16="http://schemas.microsoft.com/office/drawing/2014/main" id="{2BF7C4CE-CDB5-5060-9662-E73501BB5C06}"/>
+                </a:ext>
+              </a:extLst>
+            </p:cNvPr>
+            <p:cNvCxnSpPr>
+              <a:cxnSpLocks/>
+            </p:cNvCxnSpPr>
+            <p:nvPr/>
+          </p:nvCxnSpPr>
+          <p:spPr>
+            <a:xfrm>
+              <a:off x="2760198" y="1593594"/>
+              <a:ext cx="5314693" cy="32384"/>
+            </a:xfrm>
+            <a:prstGeom prst="line">
+              <a:avLst/>
+            </a:prstGeom>
+            <a:ln w="38100">
+              <a:solidFill>
+                <a:schemeClr val="tx1"/>
+              </a:solidFill>
+            </a:ln>
+          </p:spPr>
+          <p:style>
+            <a:lnRef idx="1">
+              <a:schemeClr val="dk1"/>
+            </a:lnRef>
+            <a:fillRef idx="0">
+              <a:schemeClr val="dk1"/>
+            </a:fillRef>
+            <a:effectRef idx="0">
+              <a:schemeClr val="dk1"/>
+            </a:effectRef>
+            <a:fontRef idx="minor">
+              <a:schemeClr val="tx1"/>
+            </a:fontRef>
+          </p:style>
+        </p:cxnSp>
+        <p:cxnSp>
+          <p:nvCxnSpPr>
+            <p:cNvPr id="26" name="Straight Connector 25">
+              <a:extLst>
+                <a:ext uri="{FF2B5EF4-FFF2-40B4-BE49-F238E27FC236}">
+                  <a16:creationId xmlns:a16="http://schemas.microsoft.com/office/drawing/2014/main" id="{1129DADF-47AB-D586-12D2-0665D06310D9}"/>
+                </a:ext>
+              </a:extLst>
+            </p:cNvPr>
+            <p:cNvCxnSpPr>
+              <a:cxnSpLocks/>
+            </p:cNvCxnSpPr>
+            <p:nvPr/>
+          </p:nvCxnSpPr>
+          <p:spPr>
+            <a:xfrm>
+              <a:off x="4380506" y="1580174"/>
+              <a:ext cx="0" cy="1416390"/>
+            </a:xfrm>
+            <a:prstGeom prst="line">
+              <a:avLst/>
+            </a:prstGeom>
+            <a:ln w="38100">
+              <a:solidFill>
+                <a:schemeClr val="tx1"/>
+              </a:solidFill>
+            </a:ln>
+          </p:spPr>
+          <p:style>
+            <a:lnRef idx="1">
+              <a:schemeClr val="dk1"/>
+            </a:lnRef>
+            <a:fillRef idx="0">
+              <a:schemeClr val="dk1"/>
+            </a:fillRef>
+            <a:effectRef idx="0">
+              <a:schemeClr val="dk1"/>
+            </a:effectRef>
+            <a:fontRef idx="minor">
+              <a:schemeClr val="tx1"/>
+            </a:fontRef>
+          </p:style>
+        </p:cxnSp>
+        <p:cxnSp>
+          <p:nvCxnSpPr>
+            <p:cNvPr id="38" name="Straight Connector 37">
+              <a:extLst>
+                <a:ext uri="{FF2B5EF4-FFF2-40B4-BE49-F238E27FC236}">
+                  <a16:creationId xmlns:a16="http://schemas.microsoft.com/office/drawing/2014/main" id="{B335111A-01B9-A390-A034-736B8EDA20C2}"/>
+                </a:ext>
+              </a:extLst>
+            </p:cNvPr>
+            <p:cNvCxnSpPr>
+              <a:cxnSpLocks/>
+            </p:cNvCxnSpPr>
+            <p:nvPr/>
+          </p:nvCxnSpPr>
+          <p:spPr>
+            <a:xfrm flipV="1">
+              <a:off x="4714205" y="3588426"/>
+              <a:ext cx="2166468" cy="936045"/>
+            </a:xfrm>
+            <a:prstGeom prst="bentConnector3">
+              <a:avLst>
+                <a:gd name="adj1" fmla="val 50000"/>
+              </a:avLst>
+            </a:prstGeom>
+            <a:ln w="38100">
+              <a:solidFill>
+                <a:schemeClr val="tx1"/>
+              </a:solidFill>
+            </a:ln>
+          </p:spPr>
+          <p:style>
+            <a:lnRef idx="1">
+              <a:schemeClr val="dk1"/>
+            </a:lnRef>
+            <a:fillRef idx="0">
+              <a:schemeClr val="dk1"/>
+            </a:fillRef>
+            <a:effectRef idx="0">
+              <a:schemeClr val="dk1"/>
+            </a:effectRef>
+            <a:fontRef idx="minor">
+              <a:schemeClr val="tx1"/>
+            </a:fontRef>
+          </p:style>
+        </p:cxnSp>
+        <p:pic>
+          <p:nvPicPr>
+            <p:cNvPr id="42" name="Picture 41">
+              <a:extLst>
+                <a:ext uri="{FF2B5EF4-FFF2-40B4-BE49-F238E27FC236}">
+                  <a16:creationId xmlns:a16="http://schemas.microsoft.com/office/drawing/2014/main" id="{AEACB6FE-A2C3-6C63-57EC-F69F015A635B}"/>
+                </a:ext>
+              </a:extLst>
+            </p:cNvPr>
+            <p:cNvPicPr>
+              <a:picLocks noChangeAspect="1"/>
+            </p:cNvPicPr>
+            <p:nvPr/>
+          </p:nvPicPr>
+          <p:blipFill>
+            <a:blip r:embed="rId6">
+              <a:extLst>
+                <a:ext uri="{28A0092B-C50C-407E-A947-70E740481C1C}">
+                  <a14:useLocalDpi xmlns:a14="http://schemas.microsoft.com/office/drawing/2010/main" val="0"/>
+                </a:ext>
+              </a:extLst>
+            </a:blip>
+            <a:srcRect l="27792" t="20693" r="28034" b="28320"/>
+            <a:stretch/>
+          </p:blipFill>
+          <p:spPr>
+            <a:xfrm>
+              <a:off x="2716291" y="2020882"/>
+              <a:ext cx="502339" cy="659613"/>
+            </a:xfrm>
+            <a:prstGeom prst="rect">
+              <a:avLst/>
+            </a:prstGeom>
+          </p:spPr>
+        </p:pic>
+        <p:pic>
+          <p:nvPicPr>
+            <p:cNvPr id="47" name="Picture 46">
+              <a:extLst>
+                <a:ext uri="{FF2B5EF4-FFF2-40B4-BE49-F238E27FC236}">
+                  <a16:creationId xmlns:a16="http://schemas.microsoft.com/office/drawing/2014/main" id="{E9ED1AB2-4114-CEAC-B519-F31CB1EFFBA1}"/>
+                </a:ext>
+              </a:extLst>
+            </p:cNvPr>
+            <p:cNvPicPr>
+              <a:picLocks noChangeAspect="1"/>
+            </p:cNvPicPr>
+            <p:nvPr/>
+          </p:nvPicPr>
+          <p:blipFill>
+            <a:blip r:embed="rId6">
+              <a:extLst>
+                <a:ext uri="{28A0092B-C50C-407E-A947-70E740481C1C}">
+                  <a14:useLocalDpi xmlns:a14="http://schemas.microsoft.com/office/drawing/2010/main" val="0"/>
+                </a:ext>
+              </a:extLst>
+            </a:blip>
+            <a:srcRect l="27792" t="20693" r="28034" b="28320"/>
+            <a:stretch/>
+          </p:blipFill>
+          <p:spPr>
+            <a:xfrm>
+              <a:off x="8940857" y="6463782"/>
+              <a:ext cx="417745" cy="413728"/>
+            </a:xfrm>
+            <a:prstGeom prst="rect">
+              <a:avLst/>
+            </a:prstGeom>
+          </p:spPr>
+        </p:pic>
+        <p:cxnSp>
+          <p:nvCxnSpPr>
+            <p:cNvPr id="48" name="Straight Connector 47">
+              <a:extLst>
+                <a:ext uri="{FF2B5EF4-FFF2-40B4-BE49-F238E27FC236}">
+                  <a16:creationId xmlns:a16="http://schemas.microsoft.com/office/drawing/2014/main" id="{A73DFE6D-B3DC-E401-753F-C2B12B5A3A35}"/>
+                </a:ext>
+              </a:extLst>
+            </p:cNvPr>
+            <p:cNvCxnSpPr>
+              <a:cxnSpLocks/>
+              <a:endCxn id="42" idx="0"/>
+            </p:cNvCxnSpPr>
+            <p:nvPr/>
+          </p:nvCxnSpPr>
+          <p:spPr>
+            <a:xfrm>
+              <a:off x="2736266" y="2020882"/>
+              <a:ext cx="231195" cy="0"/>
+            </a:xfrm>
+            <a:prstGeom prst="line">
+              <a:avLst/>
+            </a:prstGeom>
+            <a:ln w="38100">
+              <a:solidFill>
+                <a:schemeClr val="tx1"/>
+              </a:solidFill>
+            </a:ln>
+          </p:spPr>
+          <p:style>
+            <a:lnRef idx="1">
+              <a:schemeClr val="dk1"/>
+            </a:lnRef>
+            <a:fillRef idx="0">
+              <a:schemeClr val="dk1"/>
+            </a:fillRef>
+            <a:effectRef idx="0">
+              <a:schemeClr val="dk1"/>
+            </a:effectRef>
+            <a:fontRef idx="minor">
+              <a:schemeClr val="tx1"/>
+            </a:fontRef>
+          </p:style>
+        </p:cxnSp>
+        <p:sp>
+          <p:nvSpPr>
+            <p:cNvPr id="51" name="Oval 50">
+              <a:extLst>
+                <a:ext uri="{FF2B5EF4-FFF2-40B4-BE49-F238E27FC236}">
+                  <a16:creationId xmlns:a16="http://schemas.microsoft.com/office/drawing/2014/main" id="{F6F42A6D-583D-9A21-06C0-E0E3679D1E67}"/>
+                </a:ext>
+              </a:extLst>
+            </p:cNvPr>
+            <p:cNvSpPr/>
+            <p:nvPr/>
+          </p:nvSpPr>
+          <p:spPr>
+            <a:xfrm>
+              <a:off x="7963952" y="5560114"/>
+              <a:ext cx="79402" cy="94968"/>
+            </a:xfrm>
+            <a:prstGeom prst="ellipse">
+              <a:avLst/>
+            </a:prstGeom>
+          </p:spPr>
+          <p:style>
+            <a:lnRef idx="2">
+              <a:schemeClr val="dk1">
+                <a:shade val="15000"/>
+              </a:schemeClr>
+            </a:lnRef>
+            <a:fillRef idx="1">
+              <a:schemeClr val="dk1"/>
+            </a:fillRef>
+            <a:effectRef idx="0">
+              <a:schemeClr val="dk1"/>
+            </a:effectRef>
+            <a:fontRef idx="minor">
+              <a:schemeClr val="lt1"/>
+            </a:fontRef>
+          </p:style>
+          <p:txBody>
+            <a:bodyPr rtlCol="0" anchor="ctr"/>
+            <a:lstStyle/>
+            <a:p>
+              <a:pPr algn="ctr"/>
+              <a:endParaRPr lang="en-US" u="sng" dirty="0"/>
+            </a:p>
+          </p:txBody>
+        </p:sp>
+        <p:sp>
+          <p:nvSpPr>
+            <p:cNvPr id="53" name="Oval 52">
+              <a:extLst>
+                <a:ext uri="{FF2B5EF4-FFF2-40B4-BE49-F238E27FC236}">
+                  <a16:creationId xmlns:a16="http://schemas.microsoft.com/office/drawing/2014/main" id="{D31398E8-EF70-EF97-0022-D1DBCAB414EB}"/>
+                </a:ext>
+              </a:extLst>
+            </p:cNvPr>
+            <p:cNvSpPr/>
+            <p:nvPr/>
+          </p:nvSpPr>
+          <p:spPr>
+            <a:xfrm>
+              <a:off x="4700113" y="4460831"/>
+              <a:ext cx="79402" cy="94968"/>
+            </a:xfrm>
+            <a:prstGeom prst="ellipse">
+              <a:avLst/>
+            </a:prstGeom>
+          </p:spPr>
+          <p:style>
+            <a:lnRef idx="2">
+              <a:schemeClr val="dk1">
+                <a:shade val="15000"/>
+              </a:schemeClr>
+            </a:lnRef>
+            <a:fillRef idx="1">
+              <a:schemeClr val="dk1"/>
+            </a:fillRef>
+            <a:effectRef idx="0">
+              <a:schemeClr val="dk1"/>
+            </a:effectRef>
+            <a:fontRef idx="minor">
+              <a:schemeClr val="lt1"/>
+            </a:fontRef>
+          </p:style>
+          <p:txBody>
+            <a:bodyPr rtlCol="0" anchor="ctr"/>
+            <a:lstStyle/>
+            <a:p>
+              <a:pPr algn="ctr"/>
+              <a:endParaRPr lang="en-US" u="sng"/>
+            </a:p>
+          </p:txBody>
+        </p:sp>
+        <p:sp>
+          <p:nvSpPr>
+            <p:cNvPr id="54" name="Oval 53">
+              <a:extLst>
+                <a:ext uri="{FF2B5EF4-FFF2-40B4-BE49-F238E27FC236}">
+                  <a16:creationId xmlns:a16="http://schemas.microsoft.com/office/drawing/2014/main" id="{D788A82B-2B67-0E08-7176-817E6F9A2A40}"/>
+                </a:ext>
+              </a:extLst>
+            </p:cNvPr>
+            <p:cNvSpPr/>
+            <p:nvPr/>
+          </p:nvSpPr>
+          <p:spPr>
+            <a:xfrm>
+              <a:off x="4686021" y="3400253"/>
+              <a:ext cx="79402" cy="94968"/>
+            </a:xfrm>
+            <a:prstGeom prst="ellipse">
+              <a:avLst/>
+            </a:prstGeom>
+          </p:spPr>
+          <p:style>
+            <a:lnRef idx="2">
+              <a:schemeClr val="dk1">
+                <a:shade val="15000"/>
+              </a:schemeClr>
+            </a:lnRef>
+            <a:fillRef idx="1">
+              <a:schemeClr val="dk1"/>
+            </a:fillRef>
+            <a:effectRef idx="0">
+              <a:schemeClr val="dk1"/>
+            </a:effectRef>
+            <a:fontRef idx="minor">
+              <a:schemeClr val="lt1"/>
+            </a:fontRef>
+          </p:style>
+          <p:txBody>
+            <a:bodyPr rtlCol="0" anchor="ctr"/>
+            <a:lstStyle/>
+            <a:p>
+              <a:pPr algn="ctr"/>
+              <a:endParaRPr lang="en-US" u="sng" dirty="0"/>
+            </a:p>
+          </p:txBody>
+        </p:sp>
+        <p:sp>
+          <p:nvSpPr>
+            <p:cNvPr id="55" name="Oval 54">
+              <a:extLst>
+                <a:ext uri="{FF2B5EF4-FFF2-40B4-BE49-F238E27FC236}">
+                  <a16:creationId xmlns:a16="http://schemas.microsoft.com/office/drawing/2014/main" id="{3FBD3104-2D05-B905-C429-AF7A7C93FC51}"/>
+                </a:ext>
+              </a:extLst>
+            </p:cNvPr>
+            <p:cNvSpPr/>
+            <p:nvPr/>
+          </p:nvSpPr>
+          <p:spPr>
+            <a:xfrm>
+              <a:off x="4340805" y="1546108"/>
+              <a:ext cx="79402" cy="94968"/>
+            </a:xfrm>
+            <a:prstGeom prst="ellipse">
+              <a:avLst/>
+            </a:prstGeom>
+          </p:spPr>
+          <p:style>
+            <a:lnRef idx="2">
+              <a:schemeClr val="dk1">
+                <a:shade val="15000"/>
+              </a:schemeClr>
+            </a:lnRef>
+            <a:fillRef idx="1">
+              <a:schemeClr val="dk1"/>
+            </a:fillRef>
+            <a:effectRef idx="0">
+              <a:schemeClr val="dk1"/>
+            </a:effectRef>
+            <a:fontRef idx="minor">
+              <a:schemeClr val="lt1"/>
+            </a:fontRef>
+          </p:style>
+          <p:txBody>
+            <a:bodyPr rtlCol="0" anchor="ctr"/>
+            <a:lstStyle/>
+            <a:p>
+              <a:pPr algn="ctr"/>
+              <a:endParaRPr lang="en-US" u="sng"/>
+            </a:p>
+          </p:txBody>
+        </p:sp>
+        <p:sp>
+          <p:nvSpPr>
+            <p:cNvPr id="57" name="Oval 56">
+              <a:extLst>
+                <a:ext uri="{FF2B5EF4-FFF2-40B4-BE49-F238E27FC236}">
+                  <a16:creationId xmlns:a16="http://schemas.microsoft.com/office/drawing/2014/main" id="{5D53E4AF-285E-2A72-CA0E-360C3466EA76}"/>
+                </a:ext>
+              </a:extLst>
+            </p:cNvPr>
+            <p:cNvSpPr/>
+            <p:nvPr/>
+          </p:nvSpPr>
+          <p:spPr>
+            <a:xfrm rot="155068">
+              <a:off x="7659188" y="4820277"/>
+              <a:ext cx="79402" cy="94968"/>
+            </a:xfrm>
+            <a:prstGeom prst="ellipse">
+              <a:avLst/>
+            </a:prstGeom>
+          </p:spPr>
+          <p:style>
+            <a:lnRef idx="2">
+              <a:schemeClr val="dk1">
+                <a:shade val="15000"/>
+              </a:schemeClr>
+            </a:lnRef>
+            <a:fillRef idx="1">
+              <a:schemeClr val="dk1"/>
+            </a:fillRef>
+            <a:effectRef idx="0">
+              <a:schemeClr val="dk1"/>
+            </a:effectRef>
+            <a:fontRef idx="minor">
+              <a:schemeClr val="lt1"/>
+            </a:fontRef>
+          </p:style>
+          <p:txBody>
+            <a:bodyPr rtlCol="0" anchor="ctr"/>
+            <a:lstStyle/>
+            <a:p>
+              <a:pPr algn="ctr"/>
+              <a:endParaRPr lang="en-US" u="sng" dirty="0"/>
+            </a:p>
+          </p:txBody>
+        </p:sp>
+        <p:sp>
+          <p:nvSpPr>
+            <p:cNvPr id="58" name="Oval 57">
+              <a:extLst>
+                <a:ext uri="{FF2B5EF4-FFF2-40B4-BE49-F238E27FC236}">
+                  <a16:creationId xmlns:a16="http://schemas.microsoft.com/office/drawing/2014/main" id="{1EE4A7FB-D7F7-37AA-A5FB-5E34109F8C93}"/>
+                </a:ext>
+              </a:extLst>
+            </p:cNvPr>
+            <p:cNvSpPr/>
+            <p:nvPr/>
+          </p:nvSpPr>
+          <p:spPr>
+            <a:xfrm>
+              <a:off x="7806602" y="4566583"/>
+              <a:ext cx="79402" cy="94968"/>
+            </a:xfrm>
+            <a:prstGeom prst="ellipse">
+              <a:avLst/>
+            </a:prstGeom>
+          </p:spPr>
+          <p:style>
+            <a:lnRef idx="2">
+              <a:schemeClr val="dk1">
+                <a:shade val="15000"/>
+              </a:schemeClr>
+            </a:lnRef>
+            <a:fillRef idx="1">
+              <a:schemeClr val="dk1"/>
+            </a:fillRef>
+            <a:effectRef idx="0">
+              <a:schemeClr val="dk1"/>
+            </a:effectRef>
+            <a:fontRef idx="minor">
+              <a:schemeClr val="lt1"/>
+            </a:fontRef>
+          </p:style>
+          <p:txBody>
+            <a:bodyPr rtlCol="0" anchor="ctr"/>
+            <a:lstStyle/>
+            <a:p>
+              <a:pPr algn="ctr"/>
+              <a:endParaRPr lang="en-US" u="sng"/>
+            </a:p>
+          </p:txBody>
+        </p:sp>
+        <p:sp>
+          <p:nvSpPr>
+            <p:cNvPr id="59" name="Oval 58">
+              <a:extLst>
+                <a:ext uri="{FF2B5EF4-FFF2-40B4-BE49-F238E27FC236}">
+                  <a16:creationId xmlns:a16="http://schemas.microsoft.com/office/drawing/2014/main" id="{580C5E22-B585-79AF-F2F0-48545DC0D33D}"/>
+                </a:ext>
+              </a:extLst>
+            </p:cNvPr>
+            <p:cNvSpPr/>
+            <p:nvPr/>
+          </p:nvSpPr>
+          <p:spPr>
+            <a:xfrm>
+              <a:off x="8035190" y="3070656"/>
+              <a:ext cx="79402" cy="94968"/>
+            </a:xfrm>
+            <a:prstGeom prst="ellipse">
+              <a:avLst/>
+            </a:prstGeom>
+          </p:spPr>
+          <p:style>
+            <a:lnRef idx="2">
+              <a:schemeClr val="dk1">
+                <a:shade val="15000"/>
+              </a:schemeClr>
+            </a:lnRef>
+            <a:fillRef idx="1">
+              <a:schemeClr val="dk1"/>
+            </a:fillRef>
+            <a:effectRef idx="0">
+              <a:schemeClr val="dk1"/>
+            </a:effectRef>
+            <a:fontRef idx="minor">
+              <a:schemeClr val="lt1"/>
+            </a:fontRef>
+          </p:style>
+          <p:txBody>
+            <a:bodyPr rtlCol="0" anchor="ctr"/>
+            <a:lstStyle/>
+            <a:p>
+              <a:pPr algn="ctr"/>
+              <a:endParaRPr lang="en-US" u="sng" dirty="0"/>
+            </a:p>
+          </p:txBody>
+        </p:sp>
+        <p:pic>
+          <p:nvPicPr>
+            <p:cNvPr id="2" name="Picture 1">
+              <a:extLst>
+                <a:ext uri="{FF2B5EF4-FFF2-40B4-BE49-F238E27FC236}">
+                  <a16:creationId xmlns:a16="http://schemas.microsoft.com/office/drawing/2014/main" id="{1F641222-E905-A465-9903-3D19CB25EDB9}"/>
+                </a:ext>
+              </a:extLst>
+            </p:cNvPr>
+            <p:cNvPicPr>
+              <a:picLocks noChangeAspect="1"/>
+            </p:cNvPicPr>
+            <p:nvPr/>
+          </p:nvPicPr>
+          <p:blipFill>
+            <a:blip r:embed="rId3">
+              <a:extLst>
+                <a:ext uri="{28A0092B-C50C-407E-A947-70E740481C1C}">
+                  <a14:useLocalDpi xmlns:a14="http://schemas.microsoft.com/office/drawing/2010/main" val="0"/>
+                </a:ext>
+              </a:extLst>
+            </a:blip>
+            <a:srcRect l="17856" r="17722"/>
+            <a:stretch/>
+          </p:blipFill>
+          <p:spPr>
+            <a:xfrm>
+              <a:off x="5947568" y="1721725"/>
+              <a:ext cx="1193968" cy="2226023"/>
+            </a:xfrm>
+            <a:prstGeom prst="rect">
+              <a:avLst/>
+            </a:prstGeom>
+          </p:spPr>
+        </p:pic>
+        <p:pic>
+          <p:nvPicPr>
+            <p:cNvPr id="5" name="Picture 4">
+              <a:extLst>
+                <a:ext uri="{FF2B5EF4-FFF2-40B4-BE49-F238E27FC236}">
+                  <a16:creationId xmlns:a16="http://schemas.microsoft.com/office/drawing/2014/main" id="{6BF889B0-4322-86C9-0EA3-BEEDE797E655}"/>
+                </a:ext>
+              </a:extLst>
+            </p:cNvPr>
+            <p:cNvPicPr>
+              <a:picLocks noChangeAspect="1"/>
+            </p:cNvPicPr>
+            <p:nvPr/>
+          </p:nvPicPr>
+          <p:blipFill>
+            <a:blip r:embed="rId2">
+              <a:extLst>
+                <a:ext uri="{28A0092B-C50C-407E-A947-70E740481C1C}">
+                  <a14:useLocalDpi xmlns:a14="http://schemas.microsoft.com/office/drawing/2010/main" val="0"/>
+                </a:ext>
+              </a:extLst>
+            </a:blip>
+            <a:srcRect t="36811" b="36590"/>
+            <a:stretch/>
+          </p:blipFill>
+          <p:spPr>
+            <a:xfrm rot="5400000" flipV="1">
+              <a:off x="3180279" y="3949360"/>
+              <a:ext cx="1075964" cy="127689"/>
+            </a:xfrm>
+            <a:prstGeom prst="rect">
+              <a:avLst/>
+            </a:prstGeom>
+          </p:spPr>
+        </p:pic>
+        <p:pic>
+          <p:nvPicPr>
+            <p:cNvPr id="6" name="Picture 5">
+              <a:extLst>
+                <a:ext uri="{FF2B5EF4-FFF2-40B4-BE49-F238E27FC236}">
+                  <a16:creationId xmlns:a16="http://schemas.microsoft.com/office/drawing/2014/main" id="{9CE0787A-6932-6F4D-57A7-37054FE778BD}"/>
+                </a:ext>
+              </a:extLst>
+            </p:cNvPr>
+            <p:cNvPicPr>
+              <a:picLocks noChangeAspect="1"/>
+            </p:cNvPicPr>
+            <p:nvPr/>
+          </p:nvPicPr>
+          <p:blipFill>
+            <a:blip r:embed="rId7">
+              <a:extLst>
+                <a:ext uri="{28A0092B-C50C-407E-A947-70E740481C1C}">
+                  <a14:useLocalDpi xmlns:a14="http://schemas.microsoft.com/office/drawing/2010/main" val="0"/>
+                </a:ext>
+              </a:extLst>
+            </a:blip>
+            <a:srcRect l="14886" r="22425" b="8348"/>
+            <a:stretch/>
+          </p:blipFill>
+          <p:spPr>
+            <a:xfrm>
+              <a:off x="3446168" y="2195666"/>
+              <a:ext cx="763668" cy="933953"/>
+            </a:xfrm>
+            <a:prstGeom prst="rect">
+              <a:avLst/>
+            </a:prstGeom>
+          </p:spPr>
+        </p:pic>
+        <p:cxnSp>
+          <p:nvCxnSpPr>
+            <p:cNvPr id="7" name="Straight Connector 6">
+              <a:extLst>
+                <a:ext uri="{FF2B5EF4-FFF2-40B4-BE49-F238E27FC236}">
+                  <a16:creationId xmlns:a16="http://schemas.microsoft.com/office/drawing/2014/main" id="{4FDCE57B-E524-7010-77CF-F7C259265943}"/>
+                </a:ext>
+              </a:extLst>
+            </p:cNvPr>
+            <p:cNvCxnSpPr>
+              <a:cxnSpLocks/>
+            </p:cNvCxnSpPr>
+            <p:nvPr/>
+          </p:nvCxnSpPr>
+          <p:spPr>
+            <a:xfrm>
+              <a:off x="3704169" y="3023242"/>
+              <a:ext cx="0" cy="451980"/>
+            </a:xfrm>
+            <a:prstGeom prst="line">
+              <a:avLst/>
+            </a:prstGeom>
+            <a:ln w="38100">
+              <a:solidFill>
+                <a:schemeClr val="tx1"/>
+              </a:solidFill>
+            </a:ln>
+          </p:spPr>
+          <p:style>
+            <a:lnRef idx="1">
+              <a:schemeClr val="dk1"/>
+            </a:lnRef>
+            <a:fillRef idx="0">
+              <a:schemeClr val="dk1"/>
+            </a:fillRef>
+            <a:effectRef idx="0">
+              <a:schemeClr val="dk1"/>
+            </a:effectRef>
+            <a:fontRef idx="minor">
+              <a:schemeClr val="tx1"/>
+            </a:fontRef>
+          </p:style>
+        </p:cxnSp>
+        <p:sp>
+          <p:nvSpPr>
+            <p:cNvPr id="9" name="Oval 8">
+              <a:extLst>
+                <a:ext uri="{FF2B5EF4-FFF2-40B4-BE49-F238E27FC236}">
+                  <a16:creationId xmlns:a16="http://schemas.microsoft.com/office/drawing/2014/main" id="{AFDC3267-BB33-5F84-7C81-E69FC3E63AFB}"/>
+                </a:ext>
+              </a:extLst>
+            </p:cNvPr>
+            <p:cNvSpPr/>
+            <p:nvPr/>
+          </p:nvSpPr>
+          <p:spPr>
+            <a:xfrm>
+              <a:off x="3678560" y="4461788"/>
+              <a:ext cx="79402" cy="94968"/>
+            </a:xfrm>
+            <a:prstGeom prst="ellipse">
+              <a:avLst/>
+            </a:prstGeom>
+          </p:spPr>
+          <p:style>
+            <a:lnRef idx="2">
+              <a:schemeClr val="dk1">
+                <a:shade val="15000"/>
+              </a:schemeClr>
+            </a:lnRef>
+            <a:fillRef idx="1">
+              <a:schemeClr val="dk1"/>
+            </a:fillRef>
+            <a:effectRef idx="0">
+              <a:schemeClr val="dk1"/>
+            </a:effectRef>
+            <a:fontRef idx="minor">
+              <a:schemeClr val="lt1"/>
+            </a:fontRef>
+          </p:style>
+          <p:txBody>
+            <a:bodyPr rtlCol="0" anchor="ctr"/>
+            <a:lstStyle/>
+            <a:p>
+              <a:pPr algn="ctr"/>
+              <a:endParaRPr lang="en-US" u="sng"/>
+            </a:p>
+          </p:txBody>
+        </p:sp>
+        <p:sp>
+          <p:nvSpPr>
+            <p:cNvPr id="11" name="Oval 10">
+              <a:extLst>
+                <a:ext uri="{FF2B5EF4-FFF2-40B4-BE49-F238E27FC236}">
+                  <a16:creationId xmlns:a16="http://schemas.microsoft.com/office/drawing/2014/main" id="{90622ED8-44D2-333C-84AF-DED711EDAF46}"/>
+                </a:ext>
+              </a:extLst>
+            </p:cNvPr>
+            <p:cNvSpPr/>
+            <p:nvPr/>
+          </p:nvSpPr>
+          <p:spPr>
+            <a:xfrm>
+              <a:off x="3664468" y="3401210"/>
+              <a:ext cx="79402" cy="94968"/>
+            </a:xfrm>
+            <a:prstGeom prst="ellipse">
+              <a:avLst/>
+            </a:prstGeom>
+          </p:spPr>
+          <p:style>
+            <a:lnRef idx="2">
+              <a:schemeClr val="dk1">
+                <a:shade val="15000"/>
+              </a:schemeClr>
+            </a:lnRef>
+            <a:fillRef idx="1">
+              <a:schemeClr val="dk1"/>
+            </a:fillRef>
+            <a:effectRef idx="0">
+              <a:schemeClr val="dk1"/>
+            </a:effectRef>
+            <a:fontRef idx="minor">
+              <a:schemeClr val="lt1"/>
+            </a:fontRef>
+          </p:style>
+          <p:txBody>
+            <a:bodyPr rtlCol="0" anchor="ctr"/>
+            <a:lstStyle/>
+            <a:p>
+              <a:pPr algn="ctr"/>
+              <a:endParaRPr lang="en-US" u="sng" dirty="0"/>
+            </a:p>
+          </p:txBody>
+        </p:sp>
+        <p:sp>
+          <p:nvSpPr>
+            <p:cNvPr id="13" name="Oval 12">
+              <a:extLst>
+                <a:ext uri="{FF2B5EF4-FFF2-40B4-BE49-F238E27FC236}">
+                  <a16:creationId xmlns:a16="http://schemas.microsoft.com/office/drawing/2014/main" id="{C9608BB5-92AF-26EA-E045-A4FB623D0B74}"/>
+                </a:ext>
+              </a:extLst>
+            </p:cNvPr>
+            <p:cNvSpPr/>
+            <p:nvPr/>
+          </p:nvSpPr>
+          <p:spPr>
+            <a:xfrm flipH="1">
+              <a:off x="3657116" y="3008705"/>
+              <a:ext cx="86754" cy="94049"/>
+            </a:xfrm>
+            <a:prstGeom prst="ellipse">
+              <a:avLst/>
+            </a:prstGeom>
+          </p:spPr>
+          <p:style>
+            <a:lnRef idx="2">
+              <a:schemeClr val="dk1">
+                <a:shade val="15000"/>
+              </a:schemeClr>
+            </a:lnRef>
+            <a:fillRef idx="1">
+              <a:schemeClr val="dk1"/>
+            </a:fillRef>
+            <a:effectRef idx="0">
+              <a:schemeClr val="dk1"/>
+            </a:effectRef>
+            <a:fontRef idx="minor">
+              <a:schemeClr val="lt1"/>
+            </a:fontRef>
+          </p:style>
+          <p:txBody>
+            <a:bodyPr rtlCol="0" anchor="ctr"/>
+            <a:lstStyle/>
+            <a:p>
+              <a:pPr algn="ctr"/>
+              <a:endParaRPr lang="en-US" dirty="0"/>
+            </a:p>
+          </p:txBody>
+        </p:sp>
+        <p:sp>
+          <p:nvSpPr>
+            <p:cNvPr id="21" name="Oval 20">
+              <a:extLst>
+                <a:ext uri="{FF2B5EF4-FFF2-40B4-BE49-F238E27FC236}">
+                  <a16:creationId xmlns:a16="http://schemas.microsoft.com/office/drawing/2014/main" id="{78F91DB6-542E-18F4-EE19-0B1A526F2BEF}"/>
+                </a:ext>
+              </a:extLst>
+            </p:cNvPr>
+            <p:cNvSpPr/>
+            <p:nvPr/>
+          </p:nvSpPr>
+          <p:spPr>
+            <a:xfrm>
+              <a:off x="2928161" y="1973397"/>
+              <a:ext cx="79402" cy="94968"/>
+            </a:xfrm>
+            <a:prstGeom prst="ellipse">
+              <a:avLst/>
+            </a:prstGeom>
+          </p:spPr>
+          <p:style>
+            <a:lnRef idx="2">
+              <a:schemeClr val="dk1">
+                <a:shade val="15000"/>
+              </a:schemeClr>
+            </a:lnRef>
+            <a:fillRef idx="1">
+              <a:schemeClr val="dk1"/>
+            </a:fillRef>
+            <a:effectRef idx="0">
+              <a:schemeClr val="dk1"/>
+            </a:effectRef>
+            <a:fontRef idx="minor">
+              <a:schemeClr val="lt1"/>
+            </a:fontRef>
+          </p:style>
+          <p:txBody>
+            <a:bodyPr rtlCol="0" anchor="ctr"/>
+            <a:lstStyle/>
+            <a:p>
+              <a:pPr algn="ctr"/>
+              <a:endParaRPr lang="en-US" u="sng"/>
+            </a:p>
+          </p:txBody>
+        </p:sp>
+        <p:cxnSp>
+          <p:nvCxnSpPr>
+            <p:cNvPr id="24" name="Straight Connector 23">
+              <a:extLst>
+                <a:ext uri="{FF2B5EF4-FFF2-40B4-BE49-F238E27FC236}">
+                  <a16:creationId xmlns:a16="http://schemas.microsoft.com/office/drawing/2014/main" id="{D3924C11-E51F-9B14-283A-224589BB33B4}"/>
+                </a:ext>
+              </a:extLst>
+            </p:cNvPr>
+            <p:cNvCxnSpPr>
+              <a:cxnSpLocks/>
+            </p:cNvCxnSpPr>
+            <p:nvPr/>
+          </p:nvCxnSpPr>
+          <p:spPr>
+            <a:xfrm>
+              <a:off x="3834954" y="2986484"/>
+              <a:ext cx="1011702" cy="0"/>
+            </a:xfrm>
+            <a:prstGeom prst="line">
+              <a:avLst/>
+            </a:prstGeom>
+            <a:ln w="38100">
+              <a:solidFill>
+                <a:schemeClr val="tx1"/>
+              </a:solidFill>
+            </a:ln>
+          </p:spPr>
+          <p:style>
+            <a:lnRef idx="1">
+              <a:schemeClr val="dk1"/>
+            </a:lnRef>
+            <a:fillRef idx="0">
+              <a:schemeClr val="dk1"/>
+            </a:fillRef>
+            <a:effectRef idx="0">
+              <a:schemeClr val="dk1"/>
+            </a:effectRef>
+            <a:fontRef idx="minor">
+              <a:schemeClr val="tx1"/>
+            </a:fontRef>
+          </p:style>
+        </p:cxnSp>
+        <p:pic>
+          <p:nvPicPr>
+            <p:cNvPr id="15" name="Picture 14">
+              <a:extLst>
+                <a:ext uri="{FF2B5EF4-FFF2-40B4-BE49-F238E27FC236}">
+                  <a16:creationId xmlns:a16="http://schemas.microsoft.com/office/drawing/2014/main" id="{7AA6245A-2C8C-A2D8-565A-C9145918E857}"/>
+                </a:ext>
+              </a:extLst>
+            </p:cNvPr>
+            <p:cNvPicPr>
+              <a:picLocks noChangeAspect="1"/>
+            </p:cNvPicPr>
+            <p:nvPr/>
+          </p:nvPicPr>
+          <p:blipFill>
+            <a:blip r:embed="rId7">
+              <a:extLst>
+                <a:ext uri="{28A0092B-C50C-407E-A947-70E740481C1C}">
+                  <a14:useLocalDpi xmlns:a14="http://schemas.microsoft.com/office/drawing/2010/main" val="0"/>
+                </a:ext>
+              </a:extLst>
+            </a:blip>
+            <a:srcRect l="14886" r="22425" b="8348"/>
+            <a:stretch/>
+          </p:blipFill>
+          <p:spPr>
+            <a:xfrm>
+              <a:off x="4457617" y="2184231"/>
+              <a:ext cx="763668" cy="933953"/>
+            </a:xfrm>
+            <a:prstGeom prst="rect">
+              <a:avLst/>
+            </a:prstGeom>
+          </p:spPr>
+        </p:pic>
+        <p:cxnSp>
+          <p:nvCxnSpPr>
+            <p:cNvPr id="28" name="Straight Connector 27">
+              <a:extLst>
+                <a:ext uri="{FF2B5EF4-FFF2-40B4-BE49-F238E27FC236}">
+                  <a16:creationId xmlns:a16="http://schemas.microsoft.com/office/drawing/2014/main" id="{FCBF69CB-EE04-06D9-61E0-45E0D4A65E0A}"/>
+                </a:ext>
+              </a:extLst>
+            </p:cNvPr>
+            <p:cNvCxnSpPr>
+              <a:cxnSpLocks/>
+            </p:cNvCxnSpPr>
+            <p:nvPr/>
+          </p:nvCxnSpPr>
+          <p:spPr>
+            <a:xfrm>
+              <a:off x="4725722" y="3022285"/>
+              <a:ext cx="0" cy="451980"/>
+            </a:xfrm>
+            <a:prstGeom prst="line">
+              <a:avLst/>
+            </a:prstGeom>
+            <a:ln w="38100">
+              <a:solidFill>
+                <a:schemeClr val="tx1"/>
+              </a:solidFill>
+            </a:ln>
+          </p:spPr>
+          <p:style>
+            <a:lnRef idx="1">
+              <a:schemeClr val="dk1"/>
+            </a:lnRef>
+            <a:fillRef idx="0">
+              <a:schemeClr val="dk1"/>
+            </a:fillRef>
+            <a:effectRef idx="0">
+              <a:schemeClr val="dk1"/>
+            </a:effectRef>
+            <a:fontRef idx="minor">
+              <a:schemeClr val="tx1"/>
+            </a:fontRef>
+          </p:style>
+        </p:cxnSp>
+        <p:sp>
+          <p:nvSpPr>
+            <p:cNvPr id="29" name="Oval 28">
+              <a:extLst>
+                <a:ext uri="{FF2B5EF4-FFF2-40B4-BE49-F238E27FC236}">
+                  <a16:creationId xmlns:a16="http://schemas.microsoft.com/office/drawing/2014/main" id="{D29B684A-98BA-F3FA-BC9D-0E28CE490AF1}"/>
+                </a:ext>
+              </a:extLst>
+            </p:cNvPr>
+            <p:cNvSpPr/>
+            <p:nvPr/>
+          </p:nvSpPr>
+          <p:spPr>
+            <a:xfrm>
+              <a:off x="4826678" y="2949080"/>
+              <a:ext cx="52260" cy="59625"/>
+            </a:xfrm>
+            <a:prstGeom prst="ellipse">
+              <a:avLst/>
+            </a:prstGeom>
+          </p:spPr>
+          <p:style>
+            <a:lnRef idx="2">
+              <a:schemeClr val="dk1">
+                <a:shade val="15000"/>
+              </a:schemeClr>
+            </a:lnRef>
+            <a:fillRef idx="1">
+              <a:schemeClr val="dk1"/>
+            </a:fillRef>
+            <a:effectRef idx="0">
+              <a:schemeClr val="dk1"/>
+            </a:effectRef>
+            <a:fontRef idx="minor">
+              <a:schemeClr val="lt1"/>
+            </a:fontRef>
+          </p:style>
+          <p:txBody>
+            <a:bodyPr rtlCol="0" anchor="ctr"/>
+            <a:lstStyle/>
+            <a:p>
+              <a:pPr algn="ctr"/>
+              <a:endParaRPr lang="en-US" dirty="0"/>
+            </a:p>
+          </p:txBody>
+        </p:sp>
+        <p:sp>
+          <p:nvSpPr>
+            <p:cNvPr id="30" name="Oval 29">
+              <a:extLst>
+                <a:ext uri="{FF2B5EF4-FFF2-40B4-BE49-F238E27FC236}">
+                  <a16:creationId xmlns:a16="http://schemas.microsoft.com/office/drawing/2014/main" id="{64C43AC4-83BB-3EAD-9D8C-F9D9349EDC49}"/>
+                </a:ext>
+              </a:extLst>
+            </p:cNvPr>
+            <p:cNvSpPr/>
+            <p:nvPr/>
+          </p:nvSpPr>
+          <p:spPr>
+            <a:xfrm>
+              <a:off x="4700113" y="2986484"/>
+              <a:ext cx="52260" cy="59625"/>
+            </a:xfrm>
+            <a:prstGeom prst="ellipse">
+              <a:avLst/>
+            </a:prstGeom>
+          </p:spPr>
+          <p:style>
+            <a:lnRef idx="2">
+              <a:schemeClr val="dk1">
+                <a:shade val="15000"/>
+              </a:schemeClr>
+            </a:lnRef>
+            <a:fillRef idx="1">
+              <a:schemeClr val="dk1"/>
+            </a:fillRef>
+            <a:effectRef idx="0">
+              <a:schemeClr val="dk1"/>
+            </a:effectRef>
+            <a:fontRef idx="minor">
+              <a:schemeClr val="lt1"/>
+            </a:fontRef>
+          </p:style>
+          <p:txBody>
+            <a:bodyPr rtlCol="0" anchor="ctr"/>
+            <a:lstStyle/>
+            <a:p>
+              <a:pPr algn="ctr"/>
+              <a:endParaRPr lang="en-US" dirty="0"/>
+            </a:p>
+          </p:txBody>
+        </p:sp>
+        <p:sp>
+          <p:nvSpPr>
+            <p:cNvPr id="31" name="Oval 30">
+              <a:extLst>
+                <a:ext uri="{FF2B5EF4-FFF2-40B4-BE49-F238E27FC236}">
+                  <a16:creationId xmlns:a16="http://schemas.microsoft.com/office/drawing/2014/main" id="{D866CD7B-8DB5-F871-161D-019A62609780}"/>
+                </a:ext>
+              </a:extLst>
+            </p:cNvPr>
+            <p:cNvSpPr/>
+            <p:nvPr/>
+          </p:nvSpPr>
+          <p:spPr>
+            <a:xfrm>
+              <a:off x="3808824" y="2960494"/>
+              <a:ext cx="52260" cy="59625"/>
+            </a:xfrm>
+            <a:prstGeom prst="ellipse">
+              <a:avLst/>
+            </a:prstGeom>
+          </p:spPr>
+          <p:style>
+            <a:lnRef idx="2">
+              <a:schemeClr val="dk1">
+                <a:shade val="15000"/>
+              </a:schemeClr>
+            </a:lnRef>
+            <a:fillRef idx="1">
+              <a:schemeClr val="dk1"/>
+            </a:fillRef>
+            <a:effectRef idx="0">
+              <a:schemeClr val="dk1"/>
+            </a:effectRef>
+            <a:fontRef idx="minor">
+              <a:schemeClr val="lt1"/>
+            </a:fontRef>
+          </p:style>
+          <p:txBody>
+            <a:bodyPr rtlCol="0" anchor="ctr"/>
+            <a:lstStyle/>
+            <a:p>
+              <a:pPr algn="ctr"/>
+              <a:endParaRPr lang="en-US" dirty="0"/>
+            </a:p>
+          </p:txBody>
+        </p:sp>
+        <p:cxnSp>
+          <p:nvCxnSpPr>
+            <p:cNvPr id="37" name="Straight Connector 37">
+              <a:extLst>
+                <a:ext uri="{FF2B5EF4-FFF2-40B4-BE49-F238E27FC236}">
+                  <a16:creationId xmlns:a16="http://schemas.microsoft.com/office/drawing/2014/main" id="{E5951BBC-BBA6-E499-10AD-AA24475D8CD8}"/>
+                </a:ext>
+              </a:extLst>
+            </p:cNvPr>
+            <p:cNvCxnSpPr>
+              <a:cxnSpLocks/>
+            </p:cNvCxnSpPr>
+            <p:nvPr/>
+          </p:nvCxnSpPr>
+          <p:spPr>
+            <a:xfrm>
+              <a:off x="3691919" y="4525428"/>
+              <a:ext cx="4338077" cy="738978"/>
+            </a:xfrm>
+            <a:prstGeom prst="bentConnector3">
+              <a:avLst>
+                <a:gd name="adj1" fmla="val 17379"/>
+              </a:avLst>
+            </a:prstGeom>
+            <a:ln w="38100">
+              <a:solidFill>
+                <a:schemeClr val="tx1"/>
+              </a:solidFill>
+            </a:ln>
+          </p:spPr>
+          <p:style>
+            <a:lnRef idx="1">
+              <a:schemeClr val="dk1"/>
+            </a:lnRef>
+            <a:fillRef idx="0">
+              <a:schemeClr val="dk1"/>
+            </a:fillRef>
+            <a:effectRef idx="0">
+              <a:schemeClr val="dk1"/>
+            </a:effectRef>
+            <a:fontRef idx="minor">
+              <a:schemeClr val="tx1"/>
+            </a:fontRef>
+          </p:style>
+        </p:cxnSp>
+        <p:sp>
+          <p:nvSpPr>
+            <p:cNvPr id="56" name="Oval 55">
+              <a:extLst>
+                <a:ext uri="{FF2B5EF4-FFF2-40B4-BE49-F238E27FC236}">
+                  <a16:creationId xmlns:a16="http://schemas.microsoft.com/office/drawing/2014/main" id="{4D0C3DC4-A0E1-55BE-1EB8-D78A3C4800C0}"/>
+                </a:ext>
+              </a:extLst>
+            </p:cNvPr>
+            <p:cNvSpPr/>
+            <p:nvPr/>
+          </p:nvSpPr>
+          <p:spPr>
+            <a:xfrm>
+              <a:off x="6834673" y="3531468"/>
+              <a:ext cx="79402" cy="94968"/>
+            </a:xfrm>
+            <a:prstGeom prst="ellipse">
+              <a:avLst/>
+            </a:prstGeom>
+          </p:spPr>
+          <p:style>
+            <a:lnRef idx="2">
+              <a:schemeClr val="dk1">
+                <a:shade val="15000"/>
+              </a:schemeClr>
+            </a:lnRef>
+            <a:fillRef idx="1">
+              <a:schemeClr val="dk1"/>
+            </a:fillRef>
+            <a:effectRef idx="0">
+              <a:schemeClr val="dk1"/>
+            </a:effectRef>
+            <a:fontRef idx="minor">
+              <a:schemeClr val="lt1"/>
+            </a:fontRef>
+          </p:style>
+          <p:txBody>
+            <a:bodyPr rtlCol="0" anchor="ctr"/>
+            <a:lstStyle/>
+            <a:p>
+              <a:pPr algn="ctr"/>
+              <a:endParaRPr lang="en-US" u="sng"/>
+            </a:p>
+          </p:txBody>
+        </p:sp>
+        <p:sp>
+          <p:nvSpPr>
+            <p:cNvPr id="46" name="Oval 45">
+              <a:extLst>
+                <a:ext uri="{FF2B5EF4-FFF2-40B4-BE49-F238E27FC236}">
+                  <a16:creationId xmlns:a16="http://schemas.microsoft.com/office/drawing/2014/main" id="{14635504-91A5-4073-AA55-1AB45486D007}"/>
+                </a:ext>
+              </a:extLst>
+            </p:cNvPr>
+            <p:cNvSpPr/>
+            <p:nvPr/>
+          </p:nvSpPr>
+          <p:spPr>
+            <a:xfrm>
+              <a:off x="7963953" y="5222852"/>
+              <a:ext cx="79402" cy="94968"/>
+            </a:xfrm>
+            <a:prstGeom prst="ellipse">
+              <a:avLst/>
+            </a:prstGeom>
+          </p:spPr>
+          <p:style>
+            <a:lnRef idx="2">
+              <a:schemeClr val="dk1">
+                <a:shade val="15000"/>
+              </a:schemeClr>
+            </a:lnRef>
+            <a:fillRef idx="1">
+              <a:schemeClr val="dk1"/>
+            </a:fillRef>
+            <a:effectRef idx="0">
+              <a:schemeClr val="dk1"/>
+            </a:effectRef>
+            <a:fontRef idx="minor">
+              <a:schemeClr val="lt1"/>
+            </a:fontRef>
+          </p:style>
+          <p:txBody>
+            <a:bodyPr rtlCol="0" anchor="ctr"/>
+            <a:lstStyle/>
+            <a:p>
+              <a:pPr algn="ctr"/>
+              <a:endParaRPr lang="en-US" u="sng"/>
+            </a:p>
+          </p:txBody>
+        </p:sp>
+        <p:sp>
+          <p:nvSpPr>
+            <p:cNvPr id="64" name="Oval 63">
+              <a:extLst>
+                <a:ext uri="{FF2B5EF4-FFF2-40B4-BE49-F238E27FC236}">
+                  <a16:creationId xmlns:a16="http://schemas.microsoft.com/office/drawing/2014/main" id="{0F4CCB4B-20BB-1703-BC0F-4C70A7C5B29B}"/>
+                </a:ext>
+              </a:extLst>
+            </p:cNvPr>
+            <p:cNvSpPr/>
+            <p:nvPr/>
+          </p:nvSpPr>
+          <p:spPr>
+            <a:xfrm>
+              <a:off x="6748645" y="3062116"/>
+              <a:ext cx="79402" cy="94968"/>
+            </a:xfrm>
+            <a:prstGeom prst="ellipse">
+              <a:avLst/>
+            </a:prstGeom>
+          </p:spPr>
+          <p:style>
+            <a:lnRef idx="2">
+              <a:schemeClr val="dk1">
+                <a:shade val="15000"/>
+              </a:schemeClr>
+            </a:lnRef>
+            <a:fillRef idx="1">
+              <a:schemeClr val="dk1"/>
+            </a:fillRef>
+            <a:effectRef idx="0">
+              <a:schemeClr val="dk1"/>
+            </a:effectRef>
+            <a:fontRef idx="minor">
+              <a:schemeClr val="lt1"/>
+            </a:fontRef>
+          </p:style>
+          <p:txBody>
+            <a:bodyPr rtlCol="0" anchor="ctr"/>
+            <a:lstStyle/>
+            <a:p>
+              <a:pPr algn="ctr"/>
+              <a:endParaRPr lang="en-US" u="sng"/>
+            </a:p>
+          </p:txBody>
+        </p:sp>
+        <p:cxnSp>
+          <p:nvCxnSpPr>
+            <p:cNvPr id="66" name="Straight Connector 37">
+              <a:extLst>
+                <a:ext uri="{FF2B5EF4-FFF2-40B4-BE49-F238E27FC236}">
+                  <a16:creationId xmlns:a16="http://schemas.microsoft.com/office/drawing/2014/main" id="{9A2A321E-8AFF-900C-7EE0-F6763AF40DE0}"/>
+                </a:ext>
+              </a:extLst>
+            </p:cNvPr>
+            <p:cNvCxnSpPr>
+              <a:cxnSpLocks/>
+            </p:cNvCxnSpPr>
+            <p:nvPr/>
+          </p:nvCxnSpPr>
+          <p:spPr>
+            <a:xfrm rot="16200000" flipV="1">
+              <a:off x="6713363" y="3857967"/>
+              <a:ext cx="1103283" cy="876366"/>
+            </a:xfrm>
+            <a:prstGeom prst="bentConnector3">
+              <a:avLst>
+                <a:gd name="adj1" fmla="val -3339"/>
+              </a:avLst>
+            </a:prstGeom>
+            <a:ln w="38100">
+              <a:solidFill>
+                <a:schemeClr val="tx1"/>
+              </a:solidFill>
+            </a:ln>
+          </p:spPr>
+          <p:style>
+            <a:lnRef idx="1">
+              <a:schemeClr val="dk1"/>
+            </a:lnRef>
+            <a:fillRef idx="0">
+              <a:schemeClr val="dk1"/>
+            </a:fillRef>
+            <a:effectRef idx="0">
+              <a:schemeClr val="dk1"/>
+            </a:effectRef>
+            <a:fontRef idx="minor">
+              <a:schemeClr val="tx1"/>
+            </a:fontRef>
+          </p:style>
+        </p:cxnSp>
+        <p:sp>
+          <p:nvSpPr>
+            <p:cNvPr id="52" name="Oval 51">
+              <a:extLst>
+                <a:ext uri="{FF2B5EF4-FFF2-40B4-BE49-F238E27FC236}">
+                  <a16:creationId xmlns:a16="http://schemas.microsoft.com/office/drawing/2014/main" id="{16BADAAD-9766-40E1-0C19-BEC7D12AD057}"/>
+                </a:ext>
+              </a:extLst>
+            </p:cNvPr>
+            <p:cNvSpPr/>
+            <p:nvPr/>
+          </p:nvSpPr>
+          <p:spPr>
+            <a:xfrm>
+              <a:off x="6784524" y="3726838"/>
+              <a:ext cx="79402" cy="94968"/>
+            </a:xfrm>
+            <a:prstGeom prst="ellipse">
+              <a:avLst/>
+            </a:prstGeom>
+          </p:spPr>
+          <p:style>
+            <a:lnRef idx="2">
+              <a:schemeClr val="dk1">
+                <a:shade val="15000"/>
+              </a:schemeClr>
+            </a:lnRef>
+            <a:fillRef idx="1">
+              <a:schemeClr val="dk1"/>
+            </a:fillRef>
+            <a:effectRef idx="0">
+              <a:schemeClr val="dk1"/>
+            </a:effectRef>
+            <a:fontRef idx="minor">
+              <a:schemeClr val="lt1"/>
+            </a:fontRef>
+          </p:style>
+          <p:txBody>
+            <a:bodyPr rtlCol="0" anchor="ctr"/>
+            <a:lstStyle/>
+            <a:p>
+              <a:pPr algn="ctr"/>
+              <a:endParaRPr lang="en-US" u="sng"/>
+            </a:p>
+          </p:txBody>
+        </p:sp>
+        <p:cxnSp>
+          <p:nvCxnSpPr>
+            <p:cNvPr id="75" name="Straight Connector 74">
+              <a:extLst>
+                <a:ext uri="{FF2B5EF4-FFF2-40B4-BE49-F238E27FC236}">
+                  <a16:creationId xmlns:a16="http://schemas.microsoft.com/office/drawing/2014/main" id="{F05D9BCC-BFC9-6D94-7D1E-9543B014F849}"/>
+                </a:ext>
+              </a:extLst>
+            </p:cNvPr>
+            <p:cNvCxnSpPr>
+              <a:cxnSpLocks/>
+            </p:cNvCxnSpPr>
+            <p:nvPr/>
+          </p:nvCxnSpPr>
+          <p:spPr>
+            <a:xfrm>
+              <a:off x="6794900" y="3118184"/>
+              <a:ext cx="1279991" cy="0"/>
+            </a:xfrm>
+            <a:prstGeom prst="line">
+              <a:avLst/>
+            </a:prstGeom>
+            <a:ln w="38100">
+              <a:solidFill>
+                <a:schemeClr val="tx1"/>
+              </a:solidFill>
+            </a:ln>
+          </p:spPr>
+          <p:style>
+            <a:lnRef idx="1">
+              <a:schemeClr val="dk1"/>
+            </a:lnRef>
+            <a:fillRef idx="0">
+              <a:schemeClr val="dk1"/>
+            </a:fillRef>
+            <a:effectRef idx="0">
+              <a:schemeClr val="dk1"/>
+            </a:effectRef>
+            <a:fontRef idx="minor">
+              <a:schemeClr val="tx1"/>
+            </a:fontRef>
+          </p:style>
+        </p:cxnSp>
+        <p:pic>
+          <p:nvPicPr>
+            <p:cNvPr id="79" name="Picture 78">
+              <a:extLst>
+                <a:ext uri="{FF2B5EF4-FFF2-40B4-BE49-F238E27FC236}">
+                  <a16:creationId xmlns:a16="http://schemas.microsoft.com/office/drawing/2014/main" id="{3C9A0C07-E448-09F0-224F-9A175EBFFB6E}"/>
+                </a:ext>
+              </a:extLst>
+            </p:cNvPr>
+            <p:cNvPicPr>
+              <a:picLocks noChangeAspect="1"/>
+            </p:cNvPicPr>
+            <p:nvPr/>
+          </p:nvPicPr>
+          <p:blipFill>
+            <a:blip r:embed="rId2">
+              <a:extLst>
+                <a:ext uri="{28A0092B-C50C-407E-A947-70E740481C1C}">
+                  <a14:useLocalDpi xmlns:a14="http://schemas.microsoft.com/office/drawing/2010/main" val="0"/>
+                </a:ext>
+              </a:extLst>
+            </a:blip>
+            <a:srcRect t="36811" b="36590"/>
+            <a:stretch/>
+          </p:blipFill>
+          <p:spPr>
+            <a:xfrm rot="5400000" flipV="1">
+              <a:off x="8720109" y="5992312"/>
+              <a:ext cx="842909" cy="100031"/>
+            </a:xfrm>
+            <a:prstGeom prst="rect">
+              <a:avLst/>
+            </a:prstGeom>
+          </p:spPr>
+        </p:pic>
+        <p:cxnSp>
+          <p:nvCxnSpPr>
+            <p:cNvPr id="80" name="Straight Connector 37">
+              <a:extLst>
+                <a:ext uri="{FF2B5EF4-FFF2-40B4-BE49-F238E27FC236}">
+                  <a16:creationId xmlns:a16="http://schemas.microsoft.com/office/drawing/2014/main" id="{25FC130B-066B-5B40-B2F0-360591D57D38}"/>
+                </a:ext>
+              </a:extLst>
+            </p:cNvPr>
+            <p:cNvCxnSpPr>
+              <a:cxnSpLocks/>
+            </p:cNvCxnSpPr>
+            <p:nvPr/>
+          </p:nvCxnSpPr>
+          <p:spPr>
+            <a:xfrm rot="10800000" flipV="1">
+              <a:off x="9149730" y="5655082"/>
+              <a:ext cx="1086501" cy="808700"/>
+            </a:xfrm>
+            <a:prstGeom prst="bentConnector3">
+              <a:avLst>
+                <a:gd name="adj1" fmla="val -2261"/>
+              </a:avLst>
+            </a:prstGeom>
+            <a:ln w="38100">
+              <a:solidFill>
+                <a:schemeClr val="tx1"/>
+              </a:solidFill>
+            </a:ln>
+          </p:spPr>
+          <p:style>
+            <a:lnRef idx="1">
+              <a:schemeClr val="dk1"/>
+            </a:lnRef>
+            <a:fillRef idx="0">
+              <a:schemeClr val="dk1"/>
+            </a:fillRef>
+            <a:effectRef idx="0">
+              <a:schemeClr val="dk1"/>
+            </a:effectRef>
+            <a:fontRef idx="minor">
+              <a:schemeClr val="tx1"/>
+            </a:fontRef>
+          </p:style>
+        </p:cxnSp>
+        <p:sp>
+          <p:nvSpPr>
+            <p:cNvPr id="90" name="Oval 89">
+              <a:extLst>
+                <a:ext uri="{FF2B5EF4-FFF2-40B4-BE49-F238E27FC236}">
+                  <a16:creationId xmlns:a16="http://schemas.microsoft.com/office/drawing/2014/main" id="{027C202D-F159-5658-3013-6445D5C2FB11}"/>
+                </a:ext>
+              </a:extLst>
+            </p:cNvPr>
+            <p:cNvSpPr/>
+            <p:nvPr/>
+          </p:nvSpPr>
+          <p:spPr>
+            <a:xfrm>
+              <a:off x="9101862" y="5564396"/>
+              <a:ext cx="79402" cy="94968"/>
+            </a:xfrm>
+            <a:prstGeom prst="ellipse">
+              <a:avLst/>
+            </a:prstGeom>
+          </p:spPr>
+          <p:style>
+            <a:lnRef idx="2">
+              <a:schemeClr val="dk1">
+                <a:shade val="15000"/>
+              </a:schemeClr>
+            </a:lnRef>
+            <a:fillRef idx="1">
+              <a:schemeClr val="dk1"/>
+            </a:fillRef>
+            <a:effectRef idx="0">
+              <a:schemeClr val="dk1"/>
+            </a:effectRef>
+            <a:fontRef idx="minor">
+              <a:schemeClr val="lt1"/>
+            </a:fontRef>
+          </p:style>
+          <p:txBody>
+            <a:bodyPr rtlCol="0" anchor="ctr"/>
+            <a:lstStyle/>
+            <a:p>
+              <a:pPr algn="ctr"/>
+              <a:endParaRPr lang="en-US" u="sng"/>
+            </a:p>
+          </p:txBody>
+        </p:sp>
+        <p:sp>
+          <p:nvSpPr>
+            <p:cNvPr id="92" name="Oval 91">
+              <a:extLst>
+                <a:ext uri="{FF2B5EF4-FFF2-40B4-BE49-F238E27FC236}">
+                  <a16:creationId xmlns:a16="http://schemas.microsoft.com/office/drawing/2014/main" id="{5690314F-4F9E-BBA7-DF9D-17F2E0AFD27E}"/>
+                </a:ext>
+              </a:extLst>
+            </p:cNvPr>
+            <p:cNvSpPr/>
+            <p:nvPr/>
+          </p:nvSpPr>
+          <p:spPr>
+            <a:xfrm>
+              <a:off x="9954913" y="5560114"/>
+              <a:ext cx="79402" cy="94968"/>
+            </a:xfrm>
+            <a:prstGeom prst="ellipse">
+              <a:avLst/>
+            </a:prstGeom>
+          </p:spPr>
+          <p:style>
+            <a:lnRef idx="2">
+              <a:schemeClr val="dk1">
+                <a:shade val="15000"/>
+              </a:schemeClr>
+            </a:lnRef>
+            <a:fillRef idx="1">
+              <a:schemeClr val="dk1"/>
+            </a:fillRef>
+            <a:effectRef idx="0">
+              <a:schemeClr val="dk1"/>
+            </a:effectRef>
+            <a:fontRef idx="minor">
+              <a:schemeClr val="lt1"/>
+            </a:fontRef>
+          </p:style>
+          <p:txBody>
+            <a:bodyPr rtlCol="0" anchor="ctr"/>
+            <a:lstStyle/>
+            <a:p>
+              <a:pPr algn="ctr"/>
+              <a:endParaRPr lang="en-US" u="sng"/>
+            </a:p>
+          </p:txBody>
+        </p:sp>
+        <p:sp>
+          <p:nvSpPr>
+            <p:cNvPr id="96" name="Oval 95">
+              <a:extLst>
+                <a:ext uri="{FF2B5EF4-FFF2-40B4-BE49-F238E27FC236}">
+                  <a16:creationId xmlns:a16="http://schemas.microsoft.com/office/drawing/2014/main" id="{FF8BEDE1-7B33-F84B-08CF-4FA6D9364306}"/>
+                </a:ext>
+              </a:extLst>
+            </p:cNvPr>
+            <p:cNvSpPr/>
+            <p:nvPr/>
+          </p:nvSpPr>
+          <p:spPr>
+            <a:xfrm>
+              <a:off x="9112177" y="6423326"/>
+              <a:ext cx="79402" cy="94968"/>
+            </a:xfrm>
+            <a:prstGeom prst="ellipse">
+              <a:avLst/>
+            </a:prstGeom>
+          </p:spPr>
+          <p:style>
+            <a:lnRef idx="2">
+              <a:schemeClr val="dk1">
+                <a:shade val="15000"/>
+              </a:schemeClr>
+            </a:lnRef>
+            <a:fillRef idx="1">
+              <a:schemeClr val="dk1"/>
+            </a:fillRef>
+            <a:effectRef idx="0">
+              <a:schemeClr val="dk1"/>
+            </a:effectRef>
+            <a:fontRef idx="minor">
+              <a:schemeClr val="lt1"/>
+            </a:fontRef>
+          </p:style>
+          <p:txBody>
+            <a:bodyPr rtlCol="0" anchor="ctr"/>
+            <a:lstStyle/>
+            <a:p>
+              <a:pPr algn="ctr"/>
+              <a:endParaRPr lang="en-US" u="sng" dirty="0"/>
+            </a:p>
+          </p:txBody>
+        </p:sp>
+        <p:sp>
+          <p:nvSpPr>
+            <p:cNvPr id="98" name="Oval 97">
+              <a:extLst>
+                <a:ext uri="{FF2B5EF4-FFF2-40B4-BE49-F238E27FC236}">
+                  <a16:creationId xmlns:a16="http://schemas.microsoft.com/office/drawing/2014/main" id="{6FBD375D-2540-B428-0136-D30AF75A01DC}"/>
+                </a:ext>
+              </a:extLst>
+            </p:cNvPr>
+            <p:cNvSpPr/>
+            <p:nvPr/>
+          </p:nvSpPr>
+          <p:spPr>
+            <a:xfrm>
+              <a:off x="10215011" y="5618909"/>
+              <a:ext cx="79402" cy="94968"/>
+            </a:xfrm>
+            <a:prstGeom prst="ellipse">
+              <a:avLst/>
+            </a:prstGeom>
+          </p:spPr>
+          <p:style>
+            <a:lnRef idx="2">
+              <a:schemeClr val="dk1">
+                <a:shade val="15000"/>
+              </a:schemeClr>
+            </a:lnRef>
+            <a:fillRef idx="1">
+              <a:schemeClr val="dk1"/>
+            </a:fillRef>
+            <a:effectRef idx="0">
+              <a:schemeClr val="dk1"/>
+            </a:effectRef>
+            <a:fontRef idx="minor">
+              <a:schemeClr val="lt1"/>
+            </a:fontRef>
+          </p:style>
+          <p:txBody>
+            <a:bodyPr rtlCol="0" anchor="ctr"/>
+            <a:lstStyle/>
+            <a:p>
+              <a:pPr algn="ctr"/>
+              <a:endParaRPr lang="en-US" u="sng" dirty="0"/>
+            </a:p>
+          </p:txBody>
+        </p:sp>
+        <p:cxnSp>
+          <p:nvCxnSpPr>
+            <p:cNvPr id="101" name="Straight Connector 37">
+              <a:extLst>
+                <a:ext uri="{FF2B5EF4-FFF2-40B4-BE49-F238E27FC236}">
+                  <a16:creationId xmlns:a16="http://schemas.microsoft.com/office/drawing/2014/main" id="{1F047EE7-0479-0BA9-68C9-3228B98201AB}"/>
+                </a:ext>
+              </a:extLst>
+            </p:cNvPr>
+            <p:cNvCxnSpPr>
+              <a:cxnSpLocks/>
+              <a:stCxn id="51" idx="2"/>
+              <a:endCxn id="79" idx="1"/>
+            </p:cNvCxnSpPr>
+            <p:nvPr/>
+          </p:nvCxnSpPr>
+          <p:spPr>
+            <a:xfrm rot="10800000" flipH="1" flipV="1">
+              <a:off x="7963952" y="5607597"/>
+              <a:ext cx="1177612" cy="13275"/>
+            </a:xfrm>
+            <a:prstGeom prst="bentConnector4">
+              <a:avLst>
+                <a:gd name="adj1" fmla="val 2725"/>
+                <a:gd name="adj2" fmla="val 1023638"/>
+              </a:avLst>
+            </a:prstGeom>
+            <a:ln w="38100">
+              <a:solidFill>
+                <a:schemeClr val="tx1"/>
+              </a:solidFill>
+            </a:ln>
+          </p:spPr>
+          <p:style>
+            <a:lnRef idx="1">
+              <a:schemeClr val="dk1"/>
+            </a:lnRef>
+            <a:fillRef idx="0">
+              <a:schemeClr val="dk1"/>
+            </a:fillRef>
+            <a:effectRef idx="0">
+              <a:schemeClr val="dk1"/>
+            </a:effectRef>
+            <a:fontRef idx="minor">
+              <a:schemeClr val="tx1"/>
+            </a:fontRef>
+          </p:style>
+        </p:cxnSp>
+      </p:grpSp>
+      <p:sp>
+        <p:nvSpPr>
+          <p:cNvPr id="109" name="TextBox 108">
+            <a:extLst>
+              <a:ext uri="{FF2B5EF4-FFF2-40B4-BE49-F238E27FC236}">
+                <a16:creationId xmlns:a16="http://schemas.microsoft.com/office/drawing/2014/main" id="{676C1C62-EFC0-F56A-4AED-684BA679B80A}"/>
+              </a:ext>
+            </a:extLst>
+          </p:cNvPr>
+          <p:cNvSpPr txBox="1"/>
+          <p:nvPr/>
+        </p:nvSpPr>
+        <p:spPr>
+          <a:xfrm>
+            <a:off x="6117149" y="1600844"/>
+            <a:ext cx="530915" cy="276999"/>
+          </a:xfrm>
+          <a:prstGeom prst="rect">
+            <a:avLst/>
+          </a:prstGeom>
+          <a:noFill/>
+        </p:spPr>
+        <p:txBody>
+          <a:bodyPr wrap="none" rtlCol="0">
+            <a:spAutoFit/>
+          </a:bodyPr>
+          <a:lstStyle/>
+          <a:p>
+            <a:r>
+              <a:rPr lang="en-US" sz="1200" dirty="0">
+                <a:solidFill>
+                  <a:srgbClr val="2985FD"/>
+                </a:solidFill>
+                <a:latin typeface="Berlin Sans FB" panose="020E0602020502020306" pitchFamily="34" charset="0"/>
+              </a:rPr>
+              <a:t>E B C</a:t>
+            </a:r>
+          </a:p>
+        </p:txBody>
+      </p:sp>
+      <p:sp>
+        <p:nvSpPr>
+          <p:cNvPr id="110" name="TextBox 109">
+            <a:extLst>
+              <a:ext uri="{FF2B5EF4-FFF2-40B4-BE49-F238E27FC236}">
+                <a16:creationId xmlns:a16="http://schemas.microsoft.com/office/drawing/2014/main" id="{8C2E423B-0C93-F5F1-FF14-AEE3A06B53CC}"/>
+              </a:ext>
+            </a:extLst>
+          </p:cNvPr>
+          <p:cNvSpPr txBox="1"/>
+          <p:nvPr/>
+        </p:nvSpPr>
+        <p:spPr>
+          <a:xfrm>
+            <a:off x="3160445" y="2951771"/>
+            <a:ext cx="312906" cy="276999"/>
+          </a:xfrm>
+          <a:prstGeom prst="rect">
+            <a:avLst/>
+          </a:prstGeom>
+          <a:noFill/>
+        </p:spPr>
+        <p:txBody>
+          <a:bodyPr wrap="none" rtlCol="0">
+            <a:spAutoFit/>
+          </a:bodyPr>
+          <a:lstStyle/>
+          <a:p>
+            <a:r>
+              <a:rPr lang="en-US" sz="1200" dirty="0">
+                <a:latin typeface="Berlin Sans FB" panose="020E0602020502020306" pitchFamily="34" charset="0"/>
+              </a:rPr>
+              <a:t>1k</a:t>
+            </a:r>
+          </a:p>
+        </p:txBody>
+      </p:sp>
+      <p:sp>
+        <p:nvSpPr>
+          <p:cNvPr id="111" name="TextBox 110">
+            <a:extLst>
+              <a:ext uri="{FF2B5EF4-FFF2-40B4-BE49-F238E27FC236}">
+                <a16:creationId xmlns:a16="http://schemas.microsoft.com/office/drawing/2014/main" id="{4A8A2901-906A-086D-A9E2-CE914D92F62F}"/>
+              </a:ext>
+            </a:extLst>
+          </p:cNvPr>
+          <p:cNvSpPr txBox="1"/>
+          <p:nvPr/>
+        </p:nvSpPr>
+        <p:spPr>
+          <a:xfrm>
+            <a:off x="4260290" y="2948529"/>
+            <a:ext cx="312906" cy="276999"/>
+          </a:xfrm>
+          <a:prstGeom prst="rect">
+            <a:avLst/>
+          </a:prstGeom>
+          <a:noFill/>
+        </p:spPr>
+        <p:txBody>
+          <a:bodyPr wrap="none" rtlCol="0">
+            <a:spAutoFit/>
+          </a:bodyPr>
+          <a:lstStyle/>
+          <a:p>
+            <a:r>
+              <a:rPr lang="en-US" sz="1200" dirty="0">
+                <a:latin typeface="Berlin Sans FB" panose="020E0602020502020306" pitchFamily="34" charset="0"/>
+              </a:rPr>
+              <a:t>1k</a:t>
+            </a:r>
+          </a:p>
+        </p:txBody>
+      </p:sp>
+      <p:sp>
+        <p:nvSpPr>
+          <p:cNvPr id="16" name="TextBox 15">
+            <a:extLst>
+              <a:ext uri="{FF2B5EF4-FFF2-40B4-BE49-F238E27FC236}">
+                <a16:creationId xmlns:a16="http://schemas.microsoft.com/office/drawing/2014/main" id="{E193A285-E3F1-1F77-4D02-82207D8540BC}"/>
+              </a:ext>
+            </a:extLst>
+          </p:cNvPr>
+          <p:cNvSpPr txBox="1"/>
+          <p:nvPr/>
+        </p:nvSpPr>
+        <p:spPr>
+          <a:xfrm>
+            <a:off x="10952558" y="23118"/>
+            <a:ext cx="1239442" cy="369332"/>
+          </a:xfrm>
+          <a:prstGeom prst="rect">
+            <a:avLst/>
+          </a:prstGeom>
+          <a:noFill/>
+        </p:spPr>
+        <p:txBody>
+          <a:bodyPr wrap="none" rtlCol="0">
+            <a:spAutoFit/>
+          </a:bodyPr>
+          <a:lstStyle/>
+          <a:p>
+            <a:r>
+              <a:rPr lang="en-US" dirty="0">
+                <a:latin typeface="Bahnschrift SemiBold" panose="020B0502040204020203" pitchFamily="34" charset="0"/>
+              </a:rPr>
+              <a:t>Buda Tech</a:t>
+            </a:r>
+          </a:p>
+        </p:txBody>
+      </p:sp>
+      <p:sp>
+        <p:nvSpPr>
+          <p:cNvPr id="17" name="TextBox 16">
+            <a:extLst>
+              <a:ext uri="{FF2B5EF4-FFF2-40B4-BE49-F238E27FC236}">
+                <a16:creationId xmlns:a16="http://schemas.microsoft.com/office/drawing/2014/main" id="{58FF1310-DF32-1263-815E-ACB4F71AD1A2}"/>
+              </a:ext>
+            </a:extLst>
+          </p:cNvPr>
+          <p:cNvSpPr txBox="1"/>
+          <p:nvPr/>
+        </p:nvSpPr>
+        <p:spPr>
+          <a:xfrm>
+            <a:off x="5153119" y="192972"/>
+            <a:ext cx="1588897" cy="369332"/>
+          </a:xfrm>
+          <a:prstGeom prst="rect">
+            <a:avLst/>
+          </a:prstGeom>
+          <a:noFill/>
+        </p:spPr>
+        <p:txBody>
+          <a:bodyPr wrap="none" rtlCol="0">
+            <a:spAutoFit/>
+          </a:bodyPr>
+          <a:lstStyle/>
+          <a:p>
+            <a:r>
+              <a:rPr lang="en-US" dirty="0">
+                <a:latin typeface="Bahnschrift SemiBold" panose="020B0502040204020203" pitchFamily="34" charset="0"/>
+              </a:rPr>
+              <a:t>TTL OR GATE </a:t>
+            </a:r>
+          </a:p>
+        </p:txBody>
+      </p:sp>
+      <p:sp>
+        <p:nvSpPr>
+          <p:cNvPr id="40" name="TextBox 39">
+            <a:extLst>
+              <a:ext uri="{FF2B5EF4-FFF2-40B4-BE49-F238E27FC236}">
+                <a16:creationId xmlns:a16="http://schemas.microsoft.com/office/drawing/2014/main" id="{F2078132-4EBA-2FEE-5EC6-74005DA1CE0A}"/>
+              </a:ext>
+            </a:extLst>
+          </p:cNvPr>
+          <p:cNvSpPr txBox="1"/>
+          <p:nvPr/>
+        </p:nvSpPr>
+        <p:spPr>
+          <a:xfrm>
+            <a:off x="3784917" y="1045800"/>
+            <a:ext cx="1156086" cy="307777"/>
+          </a:xfrm>
+          <a:prstGeom prst="rect">
+            <a:avLst/>
+          </a:prstGeom>
+          <a:noFill/>
+        </p:spPr>
+        <p:txBody>
+          <a:bodyPr wrap="none" rtlCol="0">
+            <a:spAutoFit/>
+          </a:bodyPr>
+          <a:lstStyle/>
+          <a:p>
+            <a:r>
+              <a:rPr lang="en-US" sz="1400" dirty="0">
+                <a:solidFill>
+                  <a:srgbClr val="2985FD"/>
+                </a:solidFill>
+                <a:latin typeface="Berlin Sans FB Demi" panose="020E0802020502020306" pitchFamily="34" charset="0"/>
+              </a:rPr>
+              <a:t>S1               S2</a:t>
+            </a:r>
+          </a:p>
+        </p:txBody>
+      </p:sp>
+      <p:sp>
+        <p:nvSpPr>
+          <p:cNvPr id="41" name="TextBox 40">
+            <a:extLst>
+              <a:ext uri="{FF2B5EF4-FFF2-40B4-BE49-F238E27FC236}">
+                <a16:creationId xmlns:a16="http://schemas.microsoft.com/office/drawing/2014/main" id="{C62CFE5A-DB23-FA93-9AB4-3A62FD4759FB}"/>
+              </a:ext>
+            </a:extLst>
+          </p:cNvPr>
+          <p:cNvSpPr txBox="1"/>
+          <p:nvPr/>
+        </p:nvSpPr>
+        <p:spPr>
+          <a:xfrm>
+            <a:off x="7273514" y="3341091"/>
+            <a:ext cx="530915" cy="276999"/>
+          </a:xfrm>
+          <a:prstGeom prst="rect">
+            <a:avLst/>
+          </a:prstGeom>
+          <a:noFill/>
+        </p:spPr>
+        <p:txBody>
+          <a:bodyPr wrap="none" rtlCol="0">
+            <a:spAutoFit/>
+          </a:bodyPr>
+          <a:lstStyle/>
+          <a:p>
+            <a:r>
+              <a:rPr lang="en-US" sz="1200" dirty="0">
+                <a:solidFill>
+                  <a:srgbClr val="2985FD"/>
+                </a:solidFill>
+                <a:latin typeface="Berlin Sans FB" panose="020E0602020502020306" pitchFamily="34" charset="0"/>
+              </a:rPr>
+              <a:t>E B C</a:t>
+            </a:r>
+          </a:p>
+        </p:txBody>
+      </p:sp>
+      <p:sp>
+        <p:nvSpPr>
+          <p:cNvPr id="4" name="TextBox 3">
+            <a:extLst>
+              <a:ext uri="{FF2B5EF4-FFF2-40B4-BE49-F238E27FC236}">
+                <a16:creationId xmlns:a16="http://schemas.microsoft.com/office/drawing/2014/main" id="{7C269478-7CA8-3D63-4D27-8DBFAFBF4D6F}"/>
+              </a:ext>
+            </a:extLst>
+          </p:cNvPr>
+          <p:cNvSpPr txBox="1"/>
+          <p:nvPr/>
+        </p:nvSpPr>
+        <p:spPr>
+          <a:xfrm>
+            <a:off x="8645815" y="4914673"/>
+            <a:ext cx="354584" cy="338554"/>
+          </a:xfrm>
+          <a:prstGeom prst="rect">
+            <a:avLst/>
+          </a:prstGeom>
+          <a:noFill/>
+        </p:spPr>
+        <p:txBody>
+          <a:bodyPr wrap="none" rtlCol="0">
+            <a:spAutoFit/>
+          </a:bodyPr>
+          <a:lstStyle/>
+          <a:p>
+            <a:r>
+              <a:rPr lang="en-US" sz="1600" dirty="0">
+                <a:solidFill>
+                  <a:srgbClr val="2985FD"/>
+                </a:solidFill>
+                <a:latin typeface="Berlin Sans FB" panose="020E0602020502020306" pitchFamily="34" charset="0"/>
+              </a:rPr>
+              <a:t>1k</a:t>
+            </a:r>
+          </a:p>
+        </p:txBody>
+      </p:sp>
+      <p:sp>
+        <p:nvSpPr>
+          <p:cNvPr id="12" name="TextBox 11">
+            <a:extLst>
+              <a:ext uri="{FF2B5EF4-FFF2-40B4-BE49-F238E27FC236}">
+                <a16:creationId xmlns:a16="http://schemas.microsoft.com/office/drawing/2014/main" id="{5E5E445A-B367-C8CB-2795-3325AF1A373B}"/>
+              </a:ext>
+            </a:extLst>
+          </p:cNvPr>
+          <p:cNvSpPr txBox="1"/>
+          <p:nvPr/>
+        </p:nvSpPr>
+        <p:spPr>
+          <a:xfrm>
+            <a:off x="9232943" y="4258847"/>
+            <a:ext cx="505267" cy="338554"/>
+          </a:xfrm>
+          <a:prstGeom prst="rect">
+            <a:avLst/>
+          </a:prstGeom>
+          <a:noFill/>
+        </p:spPr>
+        <p:txBody>
+          <a:bodyPr wrap="none" rtlCol="0">
+            <a:spAutoFit/>
+          </a:bodyPr>
+          <a:lstStyle/>
+          <a:p>
+            <a:r>
+              <a:rPr lang="en-US" sz="1600" dirty="0">
+                <a:solidFill>
+                  <a:srgbClr val="2985FD"/>
+                </a:solidFill>
+                <a:latin typeface="Berlin Sans FB" panose="020E0602020502020306" pitchFamily="34" charset="0"/>
+              </a:rPr>
+              <a:t>220</a:t>
+            </a:r>
+          </a:p>
+        </p:txBody>
+      </p:sp>
+      <p:sp>
+        <p:nvSpPr>
+          <p:cNvPr id="19" name="TextBox 18">
+            <a:extLst>
+              <a:ext uri="{FF2B5EF4-FFF2-40B4-BE49-F238E27FC236}">
+                <a16:creationId xmlns:a16="http://schemas.microsoft.com/office/drawing/2014/main" id="{0CFE2119-1FAF-286F-96FA-78BE3D625EE5}"/>
+              </a:ext>
+            </a:extLst>
+          </p:cNvPr>
+          <p:cNvSpPr txBox="1"/>
+          <p:nvPr/>
+        </p:nvSpPr>
+        <p:spPr>
+          <a:xfrm>
+            <a:off x="326940" y="4896383"/>
+            <a:ext cx="8412111" cy="1938992"/>
+          </a:xfrm>
+          <a:prstGeom prst="rect">
+            <a:avLst/>
+          </a:prstGeom>
+          <a:noFill/>
+        </p:spPr>
+        <p:txBody>
+          <a:bodyPr wrap="none" rtlCol="0">
+            <a:spAutoFit/>
+          </a:bodyPr>
+          <a:lstStyle/>
+          <a:p>
+            <a:r>
+              <a:rPr lang="en-US" sz="6000" b="1" dirty="0">
+                <a:solidFill>
+                  <a:srgbClr val="FF0000"/>
+                </a:solidFill>
+                <a:latin typeface="Segoe UI" panose="020B0502040204020203" pitchFamily="34" charset="0"/>
+                <a:cs typeface="Segoe UI" panose="020B0502040204020203" pitchFamily="34" charset="0"/>
+              </a:rPr>
+              <a:t>OR GATE LOGIC USING</a:t>
+            </a:r>
+          </a:p>
+          <a:p>
+            <a:r>
+              <a:rPr lang="en-US" sz="6000" b="1" dirty="0">
+                <a:latin typeface="Segoe UI" panose="020B0502040204020203" pitchFamily="34" charset="0"/>
+                <a:cs typeface="Segoe UI" panose="020B0502040204020203" pitchFamily="34" charset="0"/>
+              </a:rPr>
+              <a:t>BC547</a:t>
+            </a:r>
+            <a:r>
+              <a:rPr lang="en-US" sz="6000" b="1" dirty="0">
+                <a:solidFill>
+                  <a:srgbClr val="FF0000"/>
+                </a:solidFill>
+                <a:latin typeface="Segoe UI" panose="020B0502040204020203" pitchFamily="34" charset="0"/>
+                <a:cs typeface="Segoe UI" panose="020B0502040204020203" pitchFamily="34" charset="0"/>
+              </a:rPr>
+              <a:t> TRANSISTORS </a:t>
+            </a:r>
+          </a:p>
+        </p:txBody>
+      </p:sp>
+      <p:graphicFrame>
+        <p:nvGraphicFramePr>
+          <p:cNvPr id="20" name="Table 19">
+            <a:extLst>
+              <a:ext uri="{FF2B5EF4-FFF2-40B4-BE49-F238E27FC236}">
+                <a16:creationId xmlns:a16="http://schemas.microsoft.com/office/drawing/2014/main" id="{02066449-DA4A-AAFD-F9C0-D3E45802CF90}"/>
+              </a:ext>
+            </a:extLst>
+          </p:cNvPr>
+          <p:cNvGraphicFramePr>
+            <a:graphicFrameLocks noGrp="1"/>
+          </p:cNvGraphicFramePr>
+          <p:nvPr>
+            <p:extLst>
+              <p:ext uri="{D42A27DB-BD31-4B8C-83A1-F6EECF244321}">
+                <p14:modId xmlns:p14="http://schemas.microsoft.com/office/powerpoint/2010/main" val="889523482"/>
+              </p:ext>
+            </p:extLst>
+          </p:nvPr>
+        </p:nvGraphicFramePr>
+        <p:xfrm>
+          <a:off x="8645815" y="1188795"/>
+          <a:ext cx="2691765" cy="1511935"/>
+        </p:xfrm>
+        <a:graphic>
+          <a:graphicData uri="http://schemas.openxmlformats.org/drawingml/2006/table">
+            <a:tbl>
+              <a:tblPr firstRow="1" firstCol="1" bandRow="1">
+                <a:tableStyleId>{2D5ABB26-0587-4C30-8999-92F81FD0307C}</a:tableStyleId>
+              </a:tblPr>
+              <a:tblGrid>
+                <a:gridCol w="897255">
+                  <a:extLst>
+                    <a:ext uri="{9D8B030D-6E8A-4147-A177-3AD203B41FA5}">
+                      <a16:colId xmlns:a16="http://schemas.microsoft.com/office/drawing/2014/main" val="3769126288"/>
+                    </a:ext>
+                  </a:extLst>
+                </a:gridCol>
+                <a:gridCol w="897255">
+                  <a:extLst>
+                    <a:ext uri="{9D8B030D-6E8A-4147-A177-3AD203B41FA5}">
+                      <a16:colId xmlns:a16="http://schemas.microsoft.com/office/drawing/2014/main" val="3735186085"/>
+                    </a:ext>
+                  </a:extLst>
+                </a:gridCol>
+                <a:gridCol w="897255">
+                  <a:extLst>
+                    <a:ext uri="{9D8B030D-6E8A-4147-A177-3AD203B41FA5}">
+                      <a16:colId xmlns:a16="http://schemas.microsoft.com/office/drawing/2014/main" val="3356837893"/>
+                    </a:ext>
+                  </a:extLst>
+                </a:gridCol>
+              </a:tblGrid>
+              <a:tr h="254000">
+                <a:tc>
+                  <a:txBody>
+                    <a:bodyPr/>
+                    <a:lstStyle/>
+                    <a:p>
+                      <a:pPr>
+                        <a:lnSpc>
+                          <a:spcPct val="107000"/>
+                        </a:lnSpc>
+                        <a:spcAft>
+                          <a:spcPts val="800"/>
+                        </a:spcAft>
+                        <a:buNone/>
+                      </a:pPr>
+                      <a:r>
+                        <a:rPr lang="en-US" sz="2000" kern="100">
+                          <a:effectLst/>
+                          <a:latin typeface="Cambria" panose="02040503050406030204" pitchFamily="18" charset="0"/>
+                          <a:ea typeface="Cambria" panose="02040503050406030204" pitchFamily="18" charset="0"/>
+                        </a:rPr>
+                        <a:t>S1</a:t>
+                      </a:r>
+                      <a:endParaRPr lang="en-US" sz="2000" kern="100">
+                        <a:effectLst/>
+                        <a:latin typeface="Cambria" panose="02040503050406030204" pitchFamily="18" charset="0"/>
+                        <a:ea typeface="Cambria" panose="02040503050406030204" pitchFamily="18" charset="0"/>
+                        <a:cs typeface="Times New Roman" panose="02020603050405020304" pitchFamily="18" charset="0"/>
+                      </a:endParaRPr>
+                    </a:p>
+                  </a:txBody>
+                  <a:tcPr marL="68580" marR="68580" marT="0" marB="0"/>
+                </a:tc>
+                <a:tc>
+                  <a:txBody>
+                    <a:bodyPr/>
+                    <a:lstStyle/>
+                    <a:p>
+                      <a:pPr>
+                        <a:lnSpc>
+                          <a:spcPct val="107000"/>
+                        </a:lnSpc>
+                        <a:spcAft>
+                          <a:spcPts val="800"/>
+                        </a:spcAft>
+                        <a:buNone/>
+                      </a:pPr>
+                      <a:r>
+                        <a:rPr lang="en-US" sz="2000" kern="100">
+                          <a:effectLst/>
+                          <a:latin typeface="Cambria" panose="02040503050406030204" pitchFamily="18" charset="0"/>
+                          <a:ea typeface="Cambria" panose="02040503050406030204" pitchFamily="18" charset="0"/>
+                        </a:rPr>
+                        <a:t>S1</a:t>
+                      </a:r>
+                      <a:endParaRPr lang="en-US" sz="2000" kern="100">
+                        <a:effectLst/>
+                        <a:latin typeface="Cambria" panose="02040503050406030204" pitchFamily="18" charset="0"/>
+                        <a:ea typeface="Cambria" panose="02040503050406030204" pitchFamily="18" charset="0"/>
+                        <a:cs typeface="Times New Roman" panose="02020603050405020304" pitchFamily="18" charset="0"/>
+                      </a:endParaRPr>
+                    </a:p>
+                  </a:txBody>
+                  <a:tcPr marL="68580" marR="68580" marT="0" marB="0"/>
+                </a:tc>
+                <a:tc>
+                  <a:txBody>
+                    <a:bodyPr/>
+                    <a:lstStyle/>
+                    <a:p>
+                      <a:pPr>
+                        <a:lnSpc>
+                          <a:spcPct val="107000"/>
+                        </a:lnSpc>
+                        <a:spcAft>
+                          <a:spcPts val="800"/>
+                        </a:spcAft>
+                        <a:buNone/>
+                      </a:pPr>
+                      <a:r>
+                        <a:rPr lang="en-US" sz="2000" kern="100">
+                          <a:effectLst/>
+                          <a:latin typeface="Cambria" panose="02040503050406030204" pitchFamily="18" charset="0"/>
+                          <a:ea typeface="Cambria" panose="02040503050406030204" pitchFamily="18" charset="0"/>
+                        </a:rPr>
+                        <a:t>LED</a:t>
+                      </a:r>
+                      <a:endParaRPr lang="en-US" sz="2000" kern="100">
+                        <a:effectLst/>
+                        <a:latin typeface="Cambria" panose="02040503050406030204" pitchFamily="18" charset="0"/>
+                        <a:ea typeface="Cambria" panose="02040503050406030204" pitchFamily="18" charset="0"/>
+                        <a:cs typeface="Times New Roman" panose="02020603050405020304" pitchFamily="18" charset="0"/>
+                      </a:endParaRPr>
+                    </a:p>
+                  </a:txBody>
+                  <a:tcPr marL="68580" marR="68580" marT="0" marB="0"/>
+                </a:tc>
+                <a:extLst>
+                  <a:ext uri="{0D108BD9-81ED-4DB2-BD59-A6C34878D82A}">
+                    <a16:rowId xmlns:a16="http://schemas.microsoft.com/office/drawing/2014/main" val="3944377278"/>
+                  </a:ext>
+                </a:extLst>
+              </a:tr>
+              <a:tr h="240030">
+                <a:tc>
+                  <a:txBody>
+                    <a:bodyPr/>
+                    <a:lstStyle/>
+                    <a:p>
+                      <a:pPr>
+                        <a:lnSpc>
+                          <a:spcPct val="107000"/>
+                        </a:lnSpc>
+                        <a:spcAft>
+                          <a:spcPts val="800"/>
+                        </a:spcAft>
+                        <a:buNone/>
+                      </a:pPr>
+                      <a:r>
+                        <a:rPr lang="en-US" sz="2000" kern="100">
+                          <a:effectLst/>
+                          <a:latin typeface="Cambria" panose="02040503050406030204" pitchFamily="18" charset="0"/>
+                          <a:ea typeface="Cambria" panose="02040503050406030204" pitchFamily="18" charset="0"/>
+                        </a:rPr>
+                        <a:t>0</a:t>
+                      </a:r>
+                      <a:endParaRPr lang="en-US" sz="2000" kern="100">
+                        <a:effectLst/>
+                        <a:latin typeface="Cambria" panose="02040503050406030204" pitchFamily="18" charset="0"/>
+                        <a:ea typeface="Cambria" panose="02040503050406030204" pitchFamily="18" charset="0"/>
+                        <a:cs typeface="Times New Roman" panose="02020603050405020304" pitchFamily="18" charset="0"/>
+                      </a:endParaRPr>
+                    </a:p>
+                  </a:txBody>
+                  <a:tcPr marL="68580" marR="68580" marT="0" marB="0"/>
+                </a:tc>
+                <a:tc>
+                  <a:txBody>
+                    <a:bodyPr/>
+                    <a:lstStyle/>
+                    <a:p>
+                      <a:pPr>
+                        <a:lnSpc>
+                          <a:spcPct val="107000"/>
+                        </a:lnSpc>
+                        <a:spcAft>
+                          <a:spcPts val="800"/>
+                        </a:spcAft>
+                        <a:buNone/>
+                      </a:pPr>
+                      <a:r>
+                        <a:rPr lang="en-US" sz="2000" kern="100" dirty="0">
+                          <a:effectLst/>
+                          <a:latin typeface="Cambria" panose="02040503050406030204" pitchFamily="18" charset="0"/>
+                          <a:ea typeface="Cambria" panose="02040503050406030204" pitchFamily="18" charset="0"/>
+                        </a:rPr>
+                        <a:t>0</a:t>
+                      </a:r>
+                      <a:endParaRPr lang="en-US" sz="2000" kern="100" dirty="0">
+                        <a:effectLst/>
+                        <a:latin typeface="Cambria" panose="02040503050406030204" pitchFamily="18" charset="0"/>
+                        <a:ea typeface="Cambria" panose="02040503050406030204" pitchFamily="18" charset="0"/>
+                        <a:cs typeface="Times New Roman" panose="02020603050405020304" pitchFamily="18" charset="0"/>
+                      </a:endParaRPr>
+                    </a:p>
+                  </a:txBody>
+                  <a:tcPr marL="68580" marR="68580" marT="0" marB="0"/>
+                </a:tc>
+                <a:tc>
+                  <a:txBody>
+                    <a:bodyPr/>
+                    <a:lstStyle/>
+                    <a:p>
+                      <a:pPr>
+                        <a:lnSpc>
+                          <a:spcPct val="107000"/>
+                        </a:lnSpc>
+                        <a:spcAft>
+                          <a:spcPts val="800"/>
+                        </a:spcAft>
+                        <a:buNone/>
+                      </a:pPr>
+                      <a:r>
+                        <a:rPr lang="en-US" sz="2000" kern="100">
+                          <a:effectLst/>
+                          <a:latin typeface="Cambria" panose="02040503050406030204" pitchFamily="18" charset="0"/>
+                          <a:ea typeface="Cambria" panose="02040503050406030204" pitchFamily="18" charset="0"/>
+                        </a:rPr>
+                        <a:t>OFF</a:t>
+                      </a:r>
+                      <a:endParaRPr lang="en-US" sz="2000" kern="100">
+                        <a:effectLst/>
+                        <a:latin typeface="Cambria" panose="02040503050406030204" pitchFamily="18" charset="0"/>
+                        <a:ea typeface="Cambria" panose="02040503050406030204" pitchFamily="18" charset="0"/>
+                        <a:cs typeface="Times New Roman" panose="02020603050405020304" pitchFamily="18" charset="0"/>
+                      </a:endParaRPr>
+                    </a:p>
+                  </a:txBody>
+                  <a:tcPr marL="68580" marR="68580" marT="0" marB="0"/>
+                </a:tc>
+                <a:extLst>
+                  <a:ext uri="{0D108BD9-81ED-4DB2-BD59-A6C34878D82A}">
+                    <a16:rowId xmlns:a16="http://schemas.microsoft.com/office/drawing/2014/main" val="1209548341"/>
+                  </a:ext>
+                </a:extLst>
+              </a:tr>
+              <a:tr h="254000">
+                <a:tc>
+                  <a:txBody>
+                    <a:bodyPr/>
+                    <a:lstStyle/>
+                    <a:p>
+                      <a:pPr>
+                        <a:lnSpc>
+                          <a:spcPct val="107000"/>
+                        </a:lnSpc>
+                        <a:spcAft>
+                          <a:spcPts val="800"/>
+                        </a:spcAft>
+                        <a:buNone/>
+                      </a:pPr>
+                      <a:r>
+                        <a:rPr lang="en-US" sz="2000" kern="100">
+                          <a:effectLst/>
+                          <a:latin typeface="Cambria" panose="02040503050406030204" pitchFamily="18" charset="0"/>
+                          <a:ea typeface="Cambria" panose="02040503050406030204" pitchFamily="18" charset="0"/>
+                        </a:rPr>
+                        <a:t>0</a:t>
+                      </a:r>
+                      <a:endParaRPr lang="en-US" sz="2000" kern="100">
+                        <a:effectLst/>
+                        <a:latin typeface="Cambria" panose="02040503050406030204" pitchFamily="18" charset="0"/>
+                        <a:ea typeface="Cambria" panose="02040503050406030204" pitchFamily="18" charset="0"/>
+                        <a:cs typeface="Times New Roman" panose="02020603050405020304" pitchFamily="18" charset="0"/>
+                      </a:endParaRPr>
+                    </a:p>
+                  </a:txBody>
+                  <a:tcPr marL="68580" marR="68580" marT="0" marB="0"/>
+                </a:tc>
+                <a:tc>
+                  <a:txBody>
+                    <a:bodyPr/>
+                    <a:lstStyle/>
+                    <a:p>
+                      <a:pPr>
+                        <a:lnSpc>
+                          <a:spcPct val="107000"/>
+                        </a:lnSpc>
+                        <a:spcAft>
+                          <a:spcPts val="800"/>
+                        </a:spcAft>
+                        <a:buNone/>
+                      </a:pPr>
+                      <a:r>
+                        <a:rPr lang="en-US" sz="2000" kern="100">
+                          <a:effectLst/>
+                          <a:latin typeface="Cambria" panose="02040503050406030204" pitchFamily="18" charset="0"/>
+                          <a:ea typeface="Cambria" panose="02040503050406030204" pitchFamily="18" charset="0"/>
+                        </a:rPr>
+                        <a:t>1</a:t>
+                      </a:r>
+                      <a:endParaRPr lang="en-US" sz="2000" kern="100">
+                        <a:effectLst/>
+                        <a:latin typeface="Cambria" panose="02040503050406030204" pitchFamily="18" charset="0"/>
+                        <a:ea typeface="Cambria" panose="02040503050406030204" pitchFamily="18" charset="0"/>
+                        <a:cs typeface="Times New Roman" panose="02020603050405020304" pitchFamily="18" charset="0"/>
+                      </a:endParaRPr>
+                    </a:p>
+                  </a:txBody>
+                  <a:tcPr marL="68580" marR="68580" marT="0" marB="0"/>
+                </a:tc>
+                <a:tc>
+                  <a:txBody>
+                    <a:bodyPr/>
+                    <a:lstStyle/>
+                    <a:p>
+                      <a:pPr>
+                        <a:lnSpc>
+                          <a:spcPct val="107000"/>
+                        </a:lnSpc>
+                        <a:spcAft>
+                          <a:spcPts val="800"/>
+                        </a:spcAft>
+                        <a:buNone/>
+                      </a:pPr>
+                      <a:r>
+                        <a:rPr lang="en-US" sz="2000" kern="100">
+                          <a:effectLst/>
+                          <a:latin typeface="Cambria" panose="02040503050406030204" pitchFamily="18" charset="0"/>
+                          <a:ea typeface="Cambria" panose="02040503050406030204" pitchFamily="18" charset="0"/>
+                        </a:rPr>
+                        <a:t>ON</a:t>
+                      </a:r>
+                      <a:endParaRPr lang="en-US" sz="2000" kern="100">
+                        <a:effectLst/>
+                        <a:latin typeface="Cambria" panose="02040503050406030204" pitchFamily="18" charset="0"/>
+                        <a:ea typeface="Cambria" panose="02040503050406030204" pitchFamily="18" charset="0"/>
+                        <a:cs typeface="Times New Roman" panose="02020603050405020304" pitchFamily="18" charset="0"/>
+                      </a:endParaRPr>
+                    </a:p>
+                  </a:txBody>
+                  <a:tcPr marL="68580" marR="68580" marT="0" marB="0"/>
+                </a:tc>
+                <a:extLst>
+                  <a:ext uri="{0D108BD9-81ED-4DB2-BD59-A6C34878D82A}">
+                    <a16:rowId xmlns:a16="http://schemas.microsoft.com/office/drawing/2014/main" val="3107786400"/>
+                  </a:ext>
+                </a:extLst>
+              </a:tr>
+              <a:tr h="240030">
+                <a:tc>
+                  <a:txBody>
+                    <a:bodyPr/>
+                    <a:lstStyle/>
+                    <a:p>
+                      <a:pPr>
+                        <a:lnSpc>
+                          <a:spcPct val="107000"/>
+                        </a:lnSpc>
+                        <a:spcAft>
+                          <a:spcPts val="800"/>
+                        </a:spcAft>
+                        <a:buNone/>
+                      </a:pPr>
+                      <a:r>
+                        <a:rPr lang="en-US" sz="2000" kern="100">
+                          <a:effectLst/>
+                          <a:latin typeface="Cambria" panose="02040503050406030204" pitchFamily="18" charset="0"/>
+                          <a:ea typeface="Cambria" panose="02040503050406030204" pitchFamily="18" charset="0"/>
+                        </a:rPr>
+                        <a:t>1</a:t>
+                      </a:r>
+                      <a:endParaRPr lang="en-US" sz="2000" kern="100">
+                        <a:effectLst/>
+                        <a:latin typeface="Cambria" panose="02040503050406030204" pitchFamily="18" charset="0"/>
+                        <a:ea typeface="Cambria" panose="02040503050406030204" pitchFamily="18" charset="0"/>
+                        <a:cs typeface="Times New Roman" panose="02020603050405020304" pitchFamily="18" charset="0"/>
+                      </a:endParaRPr>
+                    </a:p>
+                  </a:txBody>
+                  <a:tcPr marL="68580" marR="68580" marT="0" marB="0"/>
+                </a:tc>
+                <a:tc>
+                  <a:txBody>
+                    <a:bodyPr/>
+                    <a:lstStyle/>
+                    <a:p>
+                      <a:pPr>
+                        <a:lnSpc>
+                          <a:spcPct val="107000"/>
+                        </a:lnSpc>
+                        <a:spcAft>
+                          <a:spcPts val="800"/>
+                        </a:spcAft>
+                        <a:buNone/>
+                      </a:pPr>
+                      <a:r>
+                        <a:rPr lang="en-US" sz="2000" kern="100">
+                          <a:effectLst/>
+                          <a:latin typeface="Cambria" panose="02040503050406030204" pitchFamily="18" charset="0"/>
+                          <a:ea typeface="Cambria" panose="02040503050406030204" pitchFamily="18" charset="0"/>
+                        </a:rPr>
+                        <a:t>0</a:t>
+                      </a:r>
+                      <a:endParaRPr lang="en-US" sz="2000" kern="100">
+                        <a:effectLst/>
+                        <a:latin typeface="Cambria" panose="02040503050406030204" pitchFamily="18" charset="0"/>
+                        <a:ea typeface="Cambria" panose="02040503050406030204" pitchFamily="18" charset="0"/>
+                        <a:cs typeface="Times New Roman" panose="02020603050405020304" pitchFamily="18" charset="0"/>
+                      </a:endParaRPr>
+                    </a:p>
+                  </a:txBody>
+                  <a:tcPr marL="68580" marR="68580" marT="0" marB="0"/>
+                </a:tc>
+                <a:tc>
+                  <a:txBody>
+                    <a:bodyPr/>
+                    <a:lstStyle/>
+                    <a:p>
+                      <a:pPr>
+                        <a:lnSpc>
+                          <a:spcPct val="107000"/>
+                        </a:lnSpc>
+                        <a:spcAft>
+                          <a:spcPts val="800"/>
+                        </a:spcAft>
+                        <a:buNone/>
+                      </a:pPr>
+                      <a:r>
+                        <a:rPr lang="en-US" sz="2000" kern="100">
+                          <a:effectLst/>
+                          <a:latin typeface="Cambria" panose="02040503050406030204" pitchFamily="18" charset="0"/>
+                          <a:ea typeface="Cambria" panose="02040503050406030204" pitchFamily="18" charset="0"/>
+                        </a:rPr>
+                        <a:t>ON</a:t>
+                      </a:r>
+                      <a:endParaRPr lang="en-US" sz="2000" kern="100">
+                        <a:effectLst/>
+                        <a:latin typeface="Cambria" panose="02040503050406030204" pitchFamily="18" charset="0"/>
+                        <a:ea typeface="Cambria" panose="02040503050406030204" pitchFamily="18" charset="0"/>
+                        <a:cs typeface="Times New Roman" panose="02020603050405020304" pitchFamily="18" charset="0"/>
+                      </a:endParaRPr>
+                    </a:p>
+                  </a:txBody>
+                  <a:tcPr marL="68580" marR="68580" marT="0" marB="0"/>
+                </a:tc>
+                <a:extLst>
+                  <a:ext uri="{0D108BD9-81ED-4DB2-BD59-A6C34878D82A}">
+                    <a16:rowId xmlns:a16="http://schemas.microsoft.com/office/drawing/2014/main" val="3126657920"/>
+                  </a:ext>
+                </a:extLst>
+              </a:tr>
+              <a:tr h="254000">
+                <a:tc>
+                  <a:txBody>
+                    <a:bodyPr/>
+                    <a:lstStyle/>
+                    <a:p>
+                      <a:pPr>
+                        <a:lnSpc>
+                          <a:spcPct val="107000"/>
+                        </a:lnSpc>
+                        <a:spcAft>
+                          <a:spcPts val="800"/>
+                        </a:spcAft>
+                        <a:buNone/>
+                      </a:pPr>
+                      <a:r>
+                        <a:rPr lang="en-US" sz="2000" kern="100">
+                          <a:effectLst/>
+                          <a:latin typeface="Cambria" panose="02040503050406030204" pitchFamily="18" charset="0"/>
+                          <a:ea typeface="Cambria" panose="02040503050406030204" pitchFamily="18" charset="0"/>
+                        </a:rPr>
+                        <a:t>1</a:t>
+                      </a:r>
+                      <a:endParaRPr lang="en-US" sz="2000" kern="100">
+                        <a:effectLst/>
+                        <a:latin typeface="Cambria" panose="02040503050406030204" pitchFamily="18" charset="0"/>
+                        <a:ea typeface="Cambria" panose="02040503050406030204" pitchFamily="18" charset="0"/>
+                        <a:cs typeface="Times New Roman" panose="02020603050405020304" pitchFamily="18" charset="0"/>
+                      </a:endParaRPr>
+                    </a:p>
+                  </a:txBody>
+                  <a:tcPr marL="68580" marR="68580" marT="0" marB="0"/>
+                </a:tc>
+                <a:tc>
+                  <a:txBody>
+                    <a:bodyPr/>
+                    <a:lstStyle/>
+                    <a:p>
+                      <a:pPr>
+                        <a:lnSpc>
+                          <a:spcPct val="107000"/>
+                        </a:lnSpc>
+                        <a:spcAft>
+                          <a:spcPts val="800"/>
+                        </a:spcAft>
+                        <a:buNone/>
+                      </a:pPr>
+                      <a:r>
+                        <a:rPr lang="en-US" sz="2000" kern="100">
+                          <a:effectLst/>
+                          <a:latin typeface="Cambria" panose="02040503050406030204" pitchFamily="18" charset="0"/>
+                          <a:ea typeface="Cambria" panose="02040503050406030204" pitchFamily="18" charset="0"/>
+                        </a:rPr>
+                        <a:t>1</a:t>
+                      </a:r>
+                      <a:endParaRPr lang="en-US" sz="2000" kern="100">
+                        <a:effectLst/>
+                        <a:latin typeface="Cambria" panose="02040503050406030204" pitchFamily="18" charset="0"/>
+                        <a:ea typeface="Cambria" panose="02040503050406030204" pitchFamily="18" charset="0"/>
+                        <a:cs typeface="Times New Roman" panose="02020603050405020304" pitchFamily="18" charset="0"/>
+                      </a:endParaRPr>
+                    </a:p>
+                  </a:txBody>
+                  <a:tcPr marL="68580" marR="68580" marT="0" marB="0"/>
+                </a:tc>
+                <a:tc>
+                  <a:txBody>
+                    <a:bodyPr/>
+                    <a:lstStyle/>
+                    <a:p>
+                      <a:pPr>
+                        <a:lnSpc>
+                          <a:spcPct val="107000"/>
+                        </a:lnSpc>
+                        <a:spcAft>
+                          <a:spcPts val="800"/>
+                        </a:spcAft>
+                        <a:buNone/>
+                      </a:pPr>
+                      <a:r>
+                        <a:rPr lang="en-US" sz="2000" kern="100" dirty="0">
+                          <a:effectLst/>
+                          <a:latin typeface="Cambria" panose="02040503050406030204" pitchFamily="18" charset="0"/>
+                          <a:ea typeface="Cambria" panose="02040503050406030204" pitchFamily="18" charset="0"/>
+                        </a:rPr>
+                        <a:t>ON</a:t>
+                      </a:r>
+                      <a:endParaRPr lang="en-US" sz="2000" kern="100" dirty="0">
+                        <a:effectLst/>
+                        <a:latin typeface="Cambria" panose="02040503050406030204" pitchFamily="18" charset="0"/>
+                        <a:ea typeface="Cambria" panose="02040503050406030204" pitchFamily="18" charset="0"/>
+                        <a:cs typeface="Times New Roman" panose="02020603050405020304" pitchFamily="18" charset="0"/>
+                      </a:endParaRPr>
+                    </a:p>
+                  </a:txBody>
+                  <a:tcPr marL="68580" marR="68580" marT="0" marB="0"/>
+                </a:tc>
+                <a:extLst>
+                  <a:ext uri="{0D108BD9-81ED-4DB2-BD59-A6C34878D82A}">
+                    <a16:rowId xmlns:a16="http://schemas.microsoft.com/office/drawing/2014/main" val="1889113797"/>
+                  </a:ext>
+                </a:extLst>
+              </a:tr>
+            </a:tbl>
+          </a:graphicData>
+        </a:graphic>
+      </p:graphicFrame>
+    </p:spTree>
+    <p:extLst>
+      <p:ext uri="{BB962C8B-B14F-4D97-AF65-F5344CB8AC3E}">
+        <p14:creationId xmlns:p14="http://schemas.microsoft.com/office/powerpoint/2010/main" val="2877122566"/>
+      </p:ext>
+    </p:extLst>
+  </p:cSld>
+  <p:clrMapOvr>
+    <a:masterClrMapping/>
+  </p:clrMapOvr>
+  <p:transition spd="slow">
+    <p:strips dir="rd"/>
+  </p:transition>
+</p:sld>
+</file>
+
 <file path=ppt/slides/slide2.xml><?xml version="1.0" encoding="utf-8"?>
 <p:sld xmlns:a="http://schemas.openxmlformats.org/drawingml/2006/main" xmlns:r="http://schemas.openxmlformats.org/officeDocument/2006/relationships" xmlns:p="http://schemas.openxmlformats.org/presentationml/2006/main">
   <p:cSld>
@@ -7905,7 +10954,7 @@
         </p:nvGrpSpPr>
         <p:grpSpPr>
           <a:xfrm>
-            <a:off x="1232452" y="854766"/>
+            <a:off x="1105992" y="-133915"/>
             <a:ext cx="10466287" cy="6022744"/>
             <a:chOff x="1232452" y="854766"/>
             <a:chExt cx="10466287" cy="6022744"/>
@@ -9934,7 +12983,7 @@
         </p:nvSpPr>
         <p:spPr>
           <a:xfrm>
-            <a:off x="6277066" y="2596821"/>
+            <a:off x="6117149" y="1600844"/>
             <a:ext cx="530915" cy="276999"/>
           </a:xfrm>
           <a:prstGeom prst="rect">
@@ -9974,7 +13023,7 @@
         </p:nvSpPr>
         <p:spPr>
           <a:xfrm>
-            <a:off x="3320362" y="3947748"/>
+            <a:off x="3160445" y="2951771"/>
             <a:ext cx="312906" cy="276999"/>
           </a:xfrm>
           <a:prstGeom prst="rect">
@@ -10011,7 +13060,7 @@
         </p:nvSpPr>
         <p:spPr>
           <a:xfrm>
-            <a:off x="4420207" y="3944506"/>
+            <a:off x="4260290" y="2948529"/>
             <a:ext cx="312906" cy="276999"/>
           </a:xfrm>
           <a:prstGeom prst="rect">
@@ -10122,7 +13171,7 @@
         </p:nvSpPr>
         <p:spPr>
           <a:xfrm>
-            <a:off x="3944834" y="2041777"/>
+            <a:off x="3784917" y="1045800"/>
             <a:ext cx="1156086" cy="307777"/>
           </a:xfrm>
           <a:prstGeom prst="rect">
@@ -10162,7 +13211,7 @@
         </p:nvSpPr>
         <p:spPr>
           <a:xfrm>
-            <a:off x="7433431" y="4337068"/>
+            <a:off x="7273514" y="3341091"/>
             <a:ext cx="530915" cy="276999"/>
           </a:xfrm>
           <a:prstGeom prst="rect">
@@ -10202,7 +13251,7 @@
         </p:nvSpPr>
         <p:spPr>
           <a:xfrm>
-            <a:off x="8805732" y="5910650"/>
+            <a:off x="8645815" y="4914673"/>
             <a:ext cx="354584" cy="338554"/>
           </a:xfrm>
           <a:prstGeom prst="rect">
@@ -10242,7 +13291,7 @@
         </p:nvSpPr>
         <p:spPr>
           <a:xfrm>
-            <a:off x="9392860" y="5254824"/>
+            <a:off x="9232943" y="4258847"/>
             <a:ext cx="505267" cy="338554"/>
           </a:xfrm>
           <a:prstGeom prst="rect">
